--- a/docs/descargas/unity/Guia1_Ritmo.pptx
+++ b/docs/descargas/unity/Guia1_Ritmo.pptx
@@ -4551,7 +4551,7 @@
                 </a:solidFill>
                 <a:latin typeface="Calibri"/>
               </a:rPr>
-              <a:t>Requisito: la Guía 0 terminada, con el letrero Kit listo en verde.</a:t>
+              <a:t>Requisito: el kit importado (Guía 0, diapositivas 7 a 9) y el letrero Kit listo en verde.</a:t>
             </a:r>
           </a:p>
         </p:txBody>

--- a/docs/descargas/unity/Guia1_Ritmo.pptx
+++ b/docs/descargas/unity/Guia1_Ritmo.pptx
@@ -18,6 +18,7 @@
     <p:sldId id="266" r:id="rId18"/>
     <p:sldId id="267" r:id="rId19"/>
     <p:sldId id="268" r:id="rId20"/>
+    <p:sldId id="269" r:id="rId21"/>
   </p:sldIdLst>
   <p:sldSz cx="12191695" cy="6858000" type="screen4x3"/>
   <p:notesSz cx="6858000" cy="9144000"/>
@@ -584,7 +585,7 @@
           <a:lstStyle/>
           <a:p>
             <a:r>
-              <a:t>GUION. Aquí está la coordinación de verdad. En la sección tres, una mano sostiene una tecla mientras la otra hace clic: eso es independencia de manos. En la cuatro, tecla y clic van al mismo tiempo: eso es sincronización. Son dos habilidades distintas, y el juego te da datos separados de cada una.</a:t>
+              <a:t>GUION. La pausa del juego rítmico tiene una dificultad especial: la música tiene que detenerse junto con las notas. Si solo se congelara el tiempo del juego, la música seguiría sonando y todo quedaría desfasado. Lo medimos: con el tiempo detenido, el reloj de audio avanzó un segundo entero en un segundo de pausa; con AudioListener.pause se queda quieto. El prefab ya lo resuelve. A ustedes solo les toca arrastrarlo y poner el nombre.</a:t>
             </a:r>
           </a:p>
         </p:txBody>
@@ -654,7 +655,7 @@
           <a:lstStyle/>
           <a:p>
             <a:r>
-              <a:t>GUION. El reto que hace tuyo el juego: escribir tu propia partitura. Es solo texto. Copia la de rock, cámbiala y prueba. Una pista: a 120 BPM cada pulso dura medio segundo, así que el pulso 8 es el segundo 4. Y el decimal va con punto, 9.5, aunque el computador esté en español.</a:t>
+              <a:t>GUION. Aquí está la coordinación de verdad. En la sección tres, una mano sostiene una tecla mientras la otra hace clic: eso es independencia de manos. En la cuatro, tecla y clic van al mismo tiempo: eso es sincronización. Son dos habilidades distintas, y el juego te da datos separados de cada una.</a:t>
             </a:r>
           </a:p>
         </p:txBody>
@@ -724,7 +725,7 @@
           <a:lstStyle/>
           <a:p>
             <a:r>
-              <a:t>GUION. Cada canción que juegues queda como una fila en este archivo, con el género, la precisión y el error en milisegundos. Esta fila es real: la dejó el juego armado con tus piezas. Abajo, los cuatro errores que más te pueden salir, con su arreglo.</a:t>
+              <a:t>GUION. El reto que hace tuyo el juego: escribir tu propia partitura. Es solo texto. Copia la de rock, cámbiala y prueba. Una pista: a 120 BPM cada pulso dura medio segundo, así que el pulso 8 es el segundo 4. Y el decimal va con punto, 9.5, aunque el computador esté en español.</a:t>
             </a:r>
           </a:p>
         </p:txBody>
@@ -750,6 +751,76 @@
 </file>
 
 <file path=ppt/notesSlides/notesSlide13.xml><?xml version="1.0" encoding="utf-8"?>
+<p:notes xmlns:a="http://schemas.openxmlformats.org/drawingml/2006/main" xmlns:p="http://schemas.openxmlformats.org/presentationml/2006/main" xmlns:r="http://schemas.openxmlformats.org/officeDocument/2006/relationships">
+  <p:cSld>
+    <p:spTree>
+      <p:nvGrpSpPr>
+        <p:cNvPr id="1" name=""/>
+        <p:cNvGrpSpPr/>
+        <p:nvPr/>
+      </p:nvGrpSpPr>
+      <p:grpSpPr>
+        <a:xfrm>
+          <a:off x="0" y="0"/>
+          <a:ext cx="0" cy="0"/>
+          <a:chOff x="0" y="0"/>
+          <a:chExt cx="0" cy="0"/>
+        </a:xfrm>
+      </p:grpSpPr>
+      <p:sp>
+        <p:nvSpPr>
+          <p:cNvPr id="2" name="Slide Image Placeholder 1"/>
+          <p:cNvSpPr>
+            <a:spLocks noGrp="1"/>
+          </p:cNvSpPr>
+          <p:nvPr>
+            <p:ph type="sldImg" idx="2"/>
+          </p:nvPr>
+        </p:nvSpPr>
+        <p:spPr/>
+      </p:sp>
+      <p:sp>
+        <p:nvSpPr>
+          <p:cNvPr id="3" name="Notes Placeholder 2"/>
+          <p:cNvSpPr>
+            <a:spLocks noGrp="1"/>
+          </p:cNvSpPr>
+          <p:nvPr>
+            <p:ph type="body" idx="3" sz="quarter"/>
+          </p:nvPr>
+        </p:nvSpPr>
+        <p:spPr/>
+        <p:txBody>
+          <a:bodyPr/>
+          <a:lstStyle/>
+          <a:p>
+            <a:r>
+              <a:t>GUION. Cada canción que juegues queda como una fila en este archivo, con el género, la precisión y el error en milisegundos. Esta fila es real: la dejó el juego armado con tus piezas. Abajo, los cuatro errores que más te pueden salir, con su arreglo.</a:t>
+            </a:r>
+          </a:p>
+        </p:txBody>
+      </p:sp>
+      <p:sp>
+        <p:nvSpPr>
+          <p:cNvPr id="4" name="Slide Number Placeholder 3"/>
+          <p:cNvSpPr>
+            <a:spLocks noGrp="1"/>
+          </p:cNvSpPr>
+          <p:nvPr>
+            <p:ph type="sldNum" idx="5" sz="quarter"/>
+          </p:nvPr>
+        </p:nvSpPr>
+        <p:spPr/>
+      </p:sp>
+    </p:spTree>
+  </p:cSld>
+  <p:clrMapOvr>
+    <a:masterClrMapping/>
+  </p:clrMapOvr>
+</p:notes>
+</file>
+
+<file path=ppt/notesSlides/notesSlide14.xml><?xml version="1.0" encoding="utf-8"?>
 <p:notes xmlns:a="http://schemas.openxmlformats.org/drawingml/2006/main" xmlns:p="http://schemas.openxmlformats.org/presentationml/2006/main" xmlns:r="http://schemas.openxmlformats.org/officeDocument/2006/relationships">
   <p:cSld>
     <p:spTree>
@@ -4697,7 +4768,7 @@
                 </a:solidFill>
                 <a:latin typeface="Calibri"/>
               </a:rPr>
-              <a:t>Guía 1 · Ritmo  ·  1 de 13</a:t>
+              <a:t>Guía 1 · Ritmo  ·  1 de 14</a:t>
             </a:r>
           </a:p>
         </p:txBody>
@@ -4801,21 +4872,578 @@
                 </a:solidFill>
                 <a:latin typeface="Cambria"/>
               </a:rPr>
-              <a:t>Lo difícil: notas sostenidas y acordes</a:t>
-            </a:r>
-          </a:p>
-        </p:txBody>
-      </p:sp>
-      <p:sp>
-        <p:nvSpPr>
-          <p:cNvPr id="4" name="Rounded Rectangle 3"/>
+              <a:t>La pausa: un paso más en la escena 02_Ritmo</a:t>
+            </a:r>
+          </a:p>
+        </p:txBody>
+      </p:sp>
+      <p:sp>
+        <p:nvSpPr>
+          <p:cNvPr id="4" name="Oval 3"/>
           <p:cNvSpPr/>
           <p:nvPr/>
         </p:nvSpPr>
         <p:spPr>
           <a:xfrm>
-            <a:off x="512063" y="1609344"/>
-            <a:ext cx="5559552" cy="3159252"/>
+            <a:off x="548640" y="1645920"/>
+            <a:ext cx="347472" cy="347472"/>
+          </a:xfrm>
+          <a:prstGeom prst="ellipse">
+            <a:avLst/>
+          </a:prstGeom>
+          <a:solidFill>
+            <a:srgbClr val="7317C9"/>
+          </a:solidFill>
+          <a:ln>
+            <a:noFill/>
+          </a:ln>
+          <a:effectLst/>
+        </p:spPr>
+        <p:style>
+          <a:lnRef idx="1">
+            <a:schemeClr val="accent1"/>
+          </a:lnRef>
+          <a:fillRef idx="3">
+            <a:schemeClr val="accent1"/>
+          </a:fillRef>
+          <a:effectRef idx="2">
+            <a:schemeClr val="accent1"/>
+          </a:effectRef>
+          <a:fontRef idx="minor">
+            <a:schemeClr val="lt1"/>
+          </a:fontRef>
+        </p:style>
+        <p:txBody>
+          <a:bodyPr rtlCol="0" anchor="ctr" lIns="0" rIns="0" tIns="0" bIns="0"/>
+          <a:lstStyle/>
+          <a:p>
+            <a:pPr algn="ctr"/>
+            <a:r>
+              <a:rPr sz="1300" b="1">
+                <a:solidFill>
+                  <a:srgbClr val="FFFFFF"/>
+                </a:solidFill>
+                <a:latin typeface="Calibri"/>
+              </a:rPr>
+              <a:t>1</a:t>
+            </a:r>
+          </a:p>
+        </p:txBody>
+      </p:sp>
+      <p:sp>
+        <p:nvSpPr>
+          <p:cNvPr id="5" name="TextBox 4"/>
+          <p:cNvSpPr txBox="1"/>
+          <p:nvPr/>
+        </p:nvSpPr>
+        <p:spPr>
+          <a:xfrm>
+            <a:off x="1051560" y="1664208"/>
+            <a:ext cx="5349240" cy="502920"/>
+          </a:xfrm>
+          <a:prstGeom prst="rect">
+            <a:avLst/>
+          </a:prstGeom>
+          <a:noFill/>
+        </p:spPr>
+        <p:txBody>
+          <a:bodyPr wrap="square" lIns="0" rIns="0" tIns="0" bIns="0" anchor="t">
+            <a:spAutoFit/>
+          </a:bodyPr>
+          <a:lstStyle/>
+          <a:p>
+            <a:pPr algn="l">
+              <a:spcAft>
+                <a:spcPts val="600"/>
+              </a:spcAft>
+            </a:pPr>
+            <a:r>
+              <a:rPr sz="1500" b="0" i="0">
+                <a:solidFill>
+                  <a:srgbClr val="0A0E1A"/>
+                </a:solidFill>
+                <a:latin typeface="Calibri"/>
+              </a:rPr>
+              <a:t>Arrastra el prefab </a:t>
+            </a:r>
+            <a:r>
+              <a:rPr sz="1500" b="1" i="0">
+                <a:solidFill>
+                  <a:srgbClr val="0A0E1A"/>
+                </a:solidFill>
+                <a:latin typeface="Calibri"/>
+              </a:rPr>
+              <a:t>Pausa</a:t>
+            </a:r>
+            <a:r>
+              <a:rPr sz="1500" b="0" i="0">
+                <a:solidFill>
+                  <a:srgbClr val="0A0E1A"/>
+                </a:solidFill>
+                <a:latin typeface="Calibri"/>
+              </a:rPr>
+              <a:t> (KitEquipo10/Comun/Prefabs) a la escena 02_Ritmo.</a:t>
+            </a:r>
+          </a:p>
+        </p:txBody>
+      </p:sp>
+      <p:sp>
+        <p:nvSpPr>
+          <p:cNvPr id="6" name="Oval 5"/>
+          <p:cNvSpPr/>
+          <p:nvPr/>
+        </p:nvSpPr>
+        <p:spPr>
+          <a:xfrm>
+            <a:off x="548640" y="2423160"/>
+            <a:ext cx="347472" cy="347472"/>
+          </a:xfrm>
+          <a:prstGeom prst="ellipse">
+            <a:avLst/>
+          </a:prstGeom>
+          <a:solidFill>
+            <a:srgbClr val="7317C9"/>
+          </a:solidFill>
+          <a:ln>
+            <a:noFill/>
+          </a:ln>
+          <a:effectLst/>
+        </p:spPr>
+        <p:style>
+          <a:lnRef idx="1">
+            <a:schemeClr val="accent1"/>
+          </a:lnRef>
+          <a:fillRef idx="3">
+            <a:schemeClr val="accent1"/>
+          </a:fillRef>
+          <a:effectRef idx="2">
+            <a:schemeClr val="accent1"/>
+          </a:effectRef>
+          <a:fontRef idx="minor">
+            <a:schemeClr val="lt1"/>
+          </a:fontRef>
+        </p:style>
+        <p:txBody>
+          <a:bodyPr rtlCol="0" anchor="ctr" lIns="0" rIns="0" tIns="0" bIns="0"/>
+          <a:lstStyle/>
+          <a:p>
+            <a:pPr algn="ctr"/>
+            <a:r>
+              <a:rPr sz="1300" b="1">
+                <a:solidFill>
+                  <a:srgbClr val="FFFFFF"/>
+                </a:solidFill>
+                <a:latin typeface="Calibri"/>
+              </a:rPr>
+              <a:t>2</a:t>
+            </a:r>
+          </a:p>
+        </p:txBody>
+      </p:sp>
+      <p:sp>
+        <p:nvSpPr>
+          <p:cNvPr id="7" name="TextBox 6"/>
+          <p:cNvSpPr txBox="1"/>
+          <p:nvPr/>
+        </p:nvSpPr>
+        <p:spPr>
+          <a:xfrm>
+            <a:off x="1051560" y="2441448"/>
+            <a:ext cx="5349240" cy="502920"/>
+          </a:xfrm>
+          <a:prstGeom prst="rect">
+            <a:avLst/>
+          </a:prstGeom>
+          <a:noFill/>
+        </p:spPr>
+        <p:txBody>
+          <a:bodyPr wrap="square" lIns="0" rIns="0" tIns="0" bIns="0" anchor="t">
+            <a:spAutoFit/>
+          </a:bodyPr>
+          <a:lstStyle/>
+          <a:p>
+            <a:pPr algn="l">
+              <a:spcAft>
+                <a:spcPts val="600"/>
+              </a:spcAft>
+            </a:pPr>
+            <a:r>
+              <a:rPr sz="1500" b="0" i="0">
+                <a:solidFill>
+                  <a:srgbClr val="0A0E1A"/>
+                </a:solidFill>
+                <a:latin typeface="Calibri"/>
+              </a:rPr>
+              <a:t>Selecciónalo. En </a:t>
+            </a:r>
+            <a:r>
+              <a:rPr sz="1500" b="1" i="0">
+                <a:solidFill>
+                  <a:srgbClr val="0A0E1A"/>
+                </a:solidFill>
+                <a:latin typeface="Calibri"/>
+              </a:rPr>
+              <a:t>Nombre Del Juego</a:t>
+            </a:r>
+            <a:r>
+              <a:rPr sz="1500" b="0" i="0">
+                <a:solidFill>
+                  <a:srgbClr val="0A0E1A"/>
+                </a:solidFill>
+                <a:latin typeface="Calibri"/>
+              </a:rPr>
+              <a:t> escribe: Juego rítmico.</a:t>
+            </a:r>
+          </a:p>
+        </p:txBody>
+      </p:sp>
+      <p:sp>
+        <p:nvSpPr>
+          <p:cNvPr id="8" name="Oval 7"/>
+          <p:cNvSpPr/>
+          <p:nvPr/>
+        </p:nvSpPr>
+        <p:spPr>
+          <a:xfrm>
+            <a:off x="548640" y="3200400"/>
+            <a:ext cx="347472" cy="347472"/>
+          </a:xfrm>
+          <a:prstGeom prst="ellipse">
+            <a:avLst/>
+          </a:prstGeom>
+          <a:solidFill>
+            <a:srgbClr val="7317C9"/>
+          </a:solidFill>
+          <a:ln>
+            <a:noFill/>
+          </a:ln>
+          <a:effectLst/>
+        </p:spPr>
+        <p:style>
+          <a:lnRef idx="1">
+            <a:schemeClr val="accent1"/>
+          </a:lnRef>
+          <a:fillRef idx="3">
+            <a:schemeClr val="accent1"/>
+          </a:fillRef>
+          <a:effectRef idx="2">
+            <a:schemeClr val="accent1"/>
+          </a:effectRef>
+          <a:fontRef idx="minor">
+            <a:schemeClr val="lt1"/>
+          </a:fontRef>
+        </p:style>
+        <p:txBody>
+          <a:bodyPr rtlCol="0" anchor="ctr" lIns="0" rIns="0" tIns="0" bIns="0"/>
+          <a:lstStyle/>
+          <a:p>
+            <a:pPr algn="ctr"/>
+            <a:r>
+              <a:rPr sz="1300" b="1">
+                <a:solidFill>
+                  <a:srgbClr val="FFFFFF"/>
+                </a:solidFill>
+                <a:latin typeface="Calibri"/>
+              </a:rPr>
+              <a:t>3</a:t>
+            </a:r>
+          </a:p>
+        </p:txBody>
+      </p:sp>
+      <p:sp>
+        <p:nvSpPr>
+          <p:cNvPr id="9" name="TextBox 8"/>
+          <p:cNvSpPr txBox="1"/>
+          <p:nvPr/>
+        </p:nvSpPr>
+        <p:spPr>
+          <a:xfrm>
+            <a:off x="1051560" y="3218688"/>
+            <a:ext cx="5349240" cy="502920"/>
+          </a:xfrm>
+          <a:prstGeom prst="rect">
+            <a:avLst/>
+          </a:prstGeom>
+          <a:noFill/>
+        </p:spPr>
+        <p:txBody>
+          <a:bodyPr wrap="square" lIns="0" rIns="0" tIns="0" bIns="0" anchor="t">
+            <a:spAutoFit/>
+          </a:bodyPr>
+          <a:lstStyle/>
+          <a:p>
+            <a:pPr algn="l">
+              <a:spcAft>
+                <a:spcPts val="600"/>
+              </a:spcAft>
+            </a:pPr>
+            <a:r>
+              <a:rPr sz="1500" b="0" i="0">
+                <a:solidFill>
+                  <a:srgbClr val="0A0E1A"/>
+                </a:solidFill>
+                <a:latin typeface="Calibri"/>
+              </a:rPr>
+              <a:t>En </a:t>
+            </a:r>
+            <a:r>
+              <a:rPr sz="1500" b="1" i="0">
+                <a:solidFill>
+                  <a:srgbClr val="0A0E1A"/>
+                </a:solidFill>
+                <a:latin typeface="Calibri"/>
+              </a:rPr>
+              <a:t>Categoria</a:t>
+            </a:r>
+            <a:r>
+              <a:rPr sz="1500" b="0" i="0">
+                <a:solidFill>
+                  <a:srgbClr val="0A0E1A"/>
+                </a:solidFill>
+                <a:latin typeface="Calibri"/>
+              </a:rPr>
+              <a:t> elige Coordinacion, y marca </a:t>
+            </a:r>
+            <a:r>
+              <a:rPr sz="1500" b="1" i="0">
+                <a:solidFill>
+                  <a:srgbClr val="0A0E1A"/>
+                </a:solidFill>
+                <a:latin typeface="Calibri"/>
+              </a:rPr>
+              <a:t>Agregar Genero</a:t>
+            </a:r>
+            <a:r>
+              <a:rPr sz="1500" b="0" i="0">
+                <a:solidFill>
+                  <a:srgbClr val="0A0E1A"/>
+                </a:solidFill>
+                <a:latin typeface="Calibri"/>
+              </a:rPr>
+              <a:t>.</a:t>
+            </a:r>
+          </a:p>
+        </p:txBody>
+      </p:sp>
+      <p:sp>
+        <p:nvSpPr>
+          <p:cNvPr id="10" name="Oval 9"/>
+          <p:cNvSpPr/>
+          <p:nvPr/>
+        </p:nvSpPr>
+        <p:spPr>
+          <a:xfrm>
+            <a:off x="548640" y="3977639"/>
+            <a:ext cx="347472" cy="347472"/>
+          </a:xfrm>
+          <a:prstGeom prst="ellipse">
+            <a:avLst/>
+          </a:prstGeom>
+          <a:solidFill>
+            <a:srgbClr val="7317C9"/>
+          </a:solidFill>
+          <a:ln>
+            <a:noFill/>
+          </a:ln>
+          <a:effectLst/>
+        </p:spPr>
+        <p:style>
+          <a:lnRef idx="1">
+            <a:schemeClr val="accent1"/>
+          </a:lnRef>
+          <a:fillRef idx="3">
+            <a:schemeClr val="accent1"/>
+          </a:fillRef>
+          <a:effectRef idx="2">
+            <a:schemeClr val="accent1"/>
+          </a:effectRef>
+          <a:fontRef idx="minor">
+            <a:schemeClr val="lt1"/>
+          </a:fontRef>
+        </p:style>
+        <p:txBody>
+          <a:bodyPr rtlCol="0" anchor="ctr" lIns="0" rIns="0" tIns="0" bIns="0"/>
+          <a:lstStyle/>
+          <a:p>
+            <a:pPr algn="ctr"/>
+            <a:r>
+              <a:rPr sz="1300" b="1">
+                <a:solidFill>
+                  <a:srgbClr val="FFFFFF"/>
+                </a:solidFill>
+                <a:latin typeface="Calibri"/>
+              </a:rPr>
+              <a:t>4</a:t>
+            </a:r>
+          </a:p>
+        </p:txBody>
+      </p:sp>
+      <p:sp>
+        <p:nvSpPr>
+          <p:cNvPr id="11" name="TextBox 10"/>
+          <p:cNvSpPr txBox="1"/>
+          <p:nvPr/>
+        </p:nvSpPr>
+        <p:spPr>
+          <a:xfrm>
+            <a:off x="1051560" y="3995927"/>
+            <a:ext cx="5349240" cy="502920"/>
+          </a:xfrm>
+          <a:prstGeom prst="rect">
+            <a:avLst/>
+          </a:prstGeom>
+          <a:noFill/>
+        </p:spPr>
+        <p:txBody>
+          <a:bodyPr wrap="square" lIns="0" rIns="0" tIns="0" bIns="0" anchor="t">
+            <a:spAutoFit/>
+          </a:bodyPr>
+          <a:lstStyle/>
+          <a:p>
+            <a:pPr algn="l">
+              <a:spcAft>
+                <a:spcPts val="600"/>
+              </a:spcAft>
+            </a:pPr>
+            <a:r>
+              <a:rPr sz="1500" b="0" i="0">
+                <a:solidFill>
+                  <a:srgbClr val="0A0E1A"/>
+                </a:solidFill>
+                <a:latin typeface="Calibri"/>
+              </a:rPr>
+              <a:t>Dale Play y pulsa </a:t>
+            </a:r>
+            <a:r>
+              <a:rPr sz="1500" b="1" i="0">
+                <a:solidFill>
+                  <a:srgbClr val="0A0E1A"/>
+                </a:solidFill>
+                <a:latin typeface="Calibri"/>
+              </a:rPr>
+              <a:t>Esc</a:t>
+            </a:r>
+            <a:r>
+              <a:rPr sz="1500" b="0" i="0">
+                <a:solidFill>
+                  <a:srgbClr val="0A0E1A"/>
+                </a:solidFill>
+                <a:latin typeface="Calibri"/>
+              </a:rPr>
+              <a:t> a mitad de la canción.</a:t>
+            </a:r>
+          </a:p>
+        </p:txBody>
+      </p:sp>
+      <p:sp>
+        <p:nvSpPr>
+          <p:cNvPr id="12" name="Rounded Rectangle 11"/>
+          <p:cNvSpPr/>
+          <p:nvPr/>
+        </p:nvSpPr>
+        <p:spPr>
+          <a:xfrm>
+            <a:off x="548640" y="4892040"/>
+            <a:ext cx="5852160" cy="1325880"/>
+          </a:xfrm>
+          <a:prstGeom prst="roundRect">
+            <a:avLst>
+              <a:gd name="adj" fmla="val 5000"/>
+            </a:avLst>
+          </a:prstGeom>
+          <a:solidFill>
+            <a:srgbClr val="0F1424"/>
+          </a:solidFill>
+          <a:ln>
+            <a:noFill/>
+          </a:ln>
+          <a:effectLst/>
+        </p:spPr>
+        <p:style>
+          <a:lnRef idx="1">
+            <a:schemeClr val="accent1"/>
+          </a:lnRef>
+          <a:fillRef idx="3">
+            <a:schemeClr val="accent1"/>
+          </a:fillRef>
+          <a:effectRef idx="2">
+            <a:schemeClr val="accent1"/>
+          </a:effectRef>
+          <a:fontRef idx="minor">
+            <a:schemeClr val="lt1"/>
+          </a:fontRef>
+        </p:style>
+        <p:txBody>
+          <a:bodyPr rtlCol="0" anchor="ctr"/>
+          <a:lstStyle/>
+          <a:p/>
+        </p:txBody>
+      </p:sp>
+      <p:sp>
+        <p:nvSpPr>
+          <p:cNvPr id="13" name="TextBox 12"/>
+          <p:cNvSpPr txBox="1"/>
+          <p:nvPr/>
+        </p:nvSpPr>
+        <p:spPr>
+          <a:xfrm>
+            <a:off x="777240" y="5074920"/>
+            <a:ext cx="5394960" cy="1051560"/>
+          </a:xfrm>
+          <a:prstGeom prst="rect">
+            <a:avLst/>
+          </a:prstGeom>
+          <a:noFill/>
+        </p:spPr>
+        <p:txBody>
+          <a:bodyPr wrap="square" lIns="0" rIns="0" tIns="0" bIns="0" anchor="t">
+            <a:spAutoFit/>
+          </a:bodyPr>
+          <a:lstStyle/>
+          <a:p>
+            <a:pPr algn="l">
+              <a:spcAft>
+                <a:spcPts val="200"/>
+              </a:spcAft>
+            </a:pPr>
+            <a:r>
+              <a:rPr sz="1400" b="0" i="0">
+                <a:solidFill>
+                  <a:srgbClr val="E9EEFB"/>
+                </a:solidFill>
+                <a:latin typeface="Consolas"/>
+              </a:rPr>
+              <a:t>AudioListener.pause = true</a:t>
+            </a:r>
+          </a:p>
+          <a:p>
+            <a:pPr algn="l">
+              <a:spcAft>
+                <a:spcPts val="200"/>
+              </a:spcAft>
+            </a:pPr>
+            <a:r>
+              <a:rPr sz="1400" b="0" i="0">
+                <a:solidFill>
+                  <a:srgbClr val="E9EEFB"/>
+                </a:solidFill>
+                <a:latin typeface="Consolas"/>
+              </a:rPr>
+              <a:t>// la música y el reloj se detienen juntos</a:t>
+            </a:r>
+          </a:p>
+        </p:txBody>
+      </p:sp>
+      <p:sp>
+        <p:nvSpPr>
+          <p:cNvPr id="14" name="Rounded Rectangle 13"/>
+          <p:cNvSpPr/>
+          <p:nvPr/>
+        </p:nvSpPr>
+        <p:spPr>
+          <a:xfrm>
+            <a:off x="6684264" y="1609344"/>
+            <a:ext cx="5010912" cy="2850642"/>
           </a:xfrm>
           <a:prstGeom prst="roundRect">
             <a:avLst>
@@ -4852,7 +5480,7 @@
       </p:sp>
       <p:pic>
         <p:nvPicPr>
-          <p:cNvPr id="5" name="Picture 4" descr="r02_sostenidas.png"/>
+          <p:cNvPr id="15" name="Picture 14" descr="r02_pausa.png"/>
           <p:cNvPicPr>
             <a:picLocks noChangeAspect="1"/>
           </p:cNvPicPr>
@@ -4866,8 +5494,8 @@
         </p:blipFill>
         <p:spPr>
           <a:xfrm>
-            <a:off x="548640" y="1645920"/>
-            <a:ext cx="5486400" cy="3086100"/>
+            <a:off x="6720840" y="1645920"/>
+            <a:ext cx="4937760" cy="2777490"/>
           </a:xfrm>
           <a:prstGeom prst="rect">
             <a:avLst/>
@@ -4876,14 +5504,14 @@
       </p:pic>
       <p:sp>
         <p:nvSpPr>
-          <p:cNvPr id="6" name="TextBox 5"/>
+          <p:cNvPr id="16" name="TextBox 15"/>
           <p:cNvSpPr txBox="1"/>
           <p:nvPr/>
         </p:nvSpPr>
         <p:spPr>
           <a:xfrm>
-            <a:off x="548640" y="4841748"/>
-            <a:ext cx="5486400" cy="320040"/>
+            <a:off x="6720840" y="4533138"/>
+            <a:ext cx="4937760" cy="320040"/>
           </a:xfrm>
           <a:prstGeom prst="rect">
             <a:avLst/>
@@ -4908,29 +5536,29 @@
                 </a:solidFill>
                 <a:latin typeface="Calibri"/>
               </a:rPr>
-              <a:t>Sección 3: la cola es lo que hay que sostener.</a:t>
-            </a:r>
-          </a:p>
-        </p:txBody>
-      </p:sp>
-      <p:sp>
-        <p:nvSpPr>
-          <p:cNvPr id="7" name="Rounded Rectangle 6"/>
+              <a:t>La pausa del juego rítmico, en cian.</a:t>
+            </a:r>
+          </a:p>
+        </p:txBody>
+      </p:sp>
+      <p:sp>
+        <p:nvSpPr>
+          <p:cNvPr id="17" name="Rounded Rectangle 16"/>
           <p:cNvSpPr/>
           <p:nvPr/>
         </p:nvSpPr>
         <p:spPr>
           <a:xfrm>
-            <a:off x="6135624" y="1609344"/>
-            <a:ext cx="5559552" cy="3159252"/>
+            <a:off x="6720840" y="4926330"/>
+            <a:ext cx="4937760" cy="1371600"/>
           </a:xfrm>
           <a:prstGeom prst="roundRect">
             <a:avLst>
-              <a:gd name="adj" fmla="val 3000"/>
+              <a:gd name="adj" fmla="val 8000"/>
             </a:avLst>
           </a:prstGeom>
           <a:solidFill>
-            <a:srgbClr val="070B18"/>
+            <a:srgbClr val="E3F4EA"/>
           </a:solidFill>
           <a:ln>
             <a:noFill/>
@@ -4957,40 +5585,16 @@
           <a:p/>
         </p:txBody>
       </p:sp>
-      <p:pic>
-        <p:nvPicPr>
-          <p:cNvPr id="8" name="Picture 7" descr="r02_acordes.png"/>
-          <p:cNvPicPr>
-            <a:picLocks noChangeAspect="1"/>
-          </p:cNvPicPr>
-          <p:nvPr/>
-        </p:nvPicPr>
-        <p:blipFill>
-          <a:blip r:embed="rId3"/>
-          <a:stretch>
-            <a:fillRect/>
-          </a:stretch>
-        </p:blipFill>
-        <p:spPr>
-          <a:xfrm>
-            <a:off x="6172200" y="1645920"/>
-            <a:ext cx="5486400" cy="3086100"/>
-          </a:xfrm>
-          <a:prstGeom prst="rect">
-            <a:avLst/>
-          </a:prstGeom>
-        </p:spPr>
-      </p:pic>
-      <p:sp>
-        <p:nvSpPr>
-          <p:cNvPr id="9" name="TextBox 8"/>
+      <p:sp>
+        <p:nvSpPr>
+          <p:cNvPr id="18" name="TextBox 17"/>
           <p:cNvSpPr txBox="1"/>
           <p:nvPr/>
         </p:nvSpPr>
         <p:spPr>
           <a:xfrm>
-            <a:off x="6172200" y="4841748"/>
-            <a:ext cx="5486400" cy="320040"/>
+            <a:off x="6949440" y="5090922"/>
+            <a:ext cx="4480560" cy="1097280"/>
           </a:xfrm>
           <a:prstGeom prst="rect">
             <a:avLst/>
@@ -5005,31 +5609,47 @@
           <a:p>
             <a:pPr algn="l">
               <a:spcAft>
-                <a:spcPts val="600"/>
-              </a:spcAft>
-            </a:pPr>
-            <a:r>
-              <a:rPr sz="1200" b="0" i="0">
-                <a:solidFill>
-                  <a:srgbClr val="4F5C75"/>
-                </a:solidFill>
-                <a:latin typeface="Calibri"/>
-              </a:rPr>
-              <a:t>Sección 4: tecla y clic en el mismo pulso.</a:t>
-            </a:r>
-          </a:p>
-        </p:txBody>
-      </p:sp>
-      <p:sp>
-        <p:nvSpPr>
-          <p:cNvPr id="10" name="TextBox 9"/>
+                <a:spcPts val="400"/>
+              </a:spcAft>
+            </a:pPr>
+            <a:r>
+              <a:rPr sz="1300" b="1" i="0">
+                <a:solidFill>
+                  <a:srgbClr val="097A41"/>
+                </a:solidFill>
+                <a:latin typeface="Calibri"/>
+              </a:rPr>
+              <a:t>✓  Cómo sabes que quedó</a:t>
+            </a:r>
+          </a:p>
+          <a:p>
+            <a:pPr algn="l">
+              <a:spcAft>
+                <a:spcPts val="400"/>
+              </a:spcAft>
+            </a:pPr>
+            <a:r>
+              <a:rPr sz="1300" b="0" i="0">
+                <a:solidFill>
+                  <a:srgbClr val="0A0E1A"/>
+                </a:solidFill>
+                <a:latin typeface="Calibri"/>
+              </a:rPr>
+              <a:t>La música y las notas se detienen, y al continuar vuelven con la cuenta atrás, sin desfase.</a:t>
+            </a:r>
+          </a:p>
+        </p:txBody>
+      </p:sp>
+      <p:sp>
+        <p:nvSpPr>
+          <p:cNvPr id="19" name="Pie"/>
           <p:cNvSpPr txBox="1"/>
           <p:nvPr/>
         </p:nvSpPr>
         <p:spPr>
           <a:xfrm>
-            <a:off x="548640" y="5280659"/>
-            <a:ext cx="5486400" cy="1463040"/>
+            <a:off x="548640" y="6400800"/>
+            <a:ext cx="11064240" cy="274320"/>
           </a:xfrm>
           <a:prstGeom prst="rect">
             <a:avLst/>
@@ -5042,115 +5662,19 @@
           </a:bodyPr>
           <a:lstStyle/>
           <a:p>
-            <a:pPr algn="l">
+            <a:pPr algn="r">
               <a:spcAft>
                 <a:spcPts val="600"/>
               </a:spcAft>
             </a:pPr>
             <a:r>
-              <a:rPr sz="1400" b="1" i="0">
-                <a:solidFill>
-                  <a:srgbClr val="0A0E1A"/>
-                </a:solidFill>
-                <a:latin typeface="Calibri"/>
-              </a:rPr>
-              <a:t>Sostenida: </a:t>
-            </a:r>
-            <a:r>
-              <a:rPr sz="1400" b="0" i="0">
-                <a:solidFill>
-                  <a:srgbClr val="0A0E1A"/>
-                </a:solidFill>
-                <a:latin typeface="Calibri"/>
-              </a:rPr>
-              <a:t>se aprieta a tiempo y se suelta al final de la cola. Si sueltas antes, dice Soltaste y se pierde el combo.</a:t>
-            </a:r>
-          </a:p>
-        </p:txBody>
-      </p:sp>
-      <p:sp>
-        <p:nvSpPr>
-          <p:cNvPr id="11" name="TextBox 10"/>
-          <p:cNvSpPr txBox="1"/>
-          <p:nvPr/>
-        </p:nvSpPr>
-        <p:spPr>
-          <a:xfrm>
-            <a:off x="6172200" y="5280659"/>
-            <a:ext cx="5486400" cy="1463040"/>
-          </a:xfrm>
-          <a:prstGeom prst="rect">
-            <a:avLst/>
-          </a:prstGeom>
-          <a:noFill/>
-        </p:spPr>
-        <p:txBody>
-          <a:bodyPr wrap="square" lIns="0" rIns="0" tIns="0" bIns="0" anchor="t">
-            <a:spAutoFit/>
-          </a:bodyPr>
-          <a:lstStyle/>
-          <a:p>
-            <a:pPr algn="l">
-              <a:spcAft>
-                <a:spcPts val="600"/>
-              </a:spcAft>
-            </a:pPr>
-            <a:r>
-              <a:rPr sz="1400" b="1" i="0">
-                <a:solidFill>
-                  <a:srgbClr val="0A0E1A"/>
-                </a:solidFill>
-                <a:latin typeface="Calibri"/>
-              </a:rPr>
-              <a:t>Acorde: </a:t>
-            </a:r>
-            <a:r>
-              <a:rPr sz="1400" b="0" i="0">
-                <a:solidFill>
-                  <a:srgbClr val="0A0E1A"/>
-                </a:solidFill>
-                <a:latin typeface="Calibri"/>
-              </a:rPr>
-              <a:t>dos notas en el mismo pulso. Cada una se califica por separado, así que las dos manos tienen que llegar juntas.</a:t>
-            </a:r>
-          </a:p>
-        </p:txBody>
-      </p:sp>
-      <p:sp>
-        <p:nvSpPr>
-          <p:cNvPr id="12" name="Pie"/>
-          <p:cNvSpPr txBox="1"/>
-          <p:nvPr/>
-        </p:nvSpPr>
-        <p:spPr>
-          <a:xfrm>
-            <a:off x="548640" y="6400800"/>
-            <a:ext cx="11064240" cy="274320"/>
-          </a:xfrm>
-          <a:prstGeom prst="rect">
-            <a:avLst/>
-          </a:prstGeom>
-          <a:noFill/>
-        </p:spPr>
-        <p:txBody>
-          <a:bodyPr wrap="square" lIns="0" rIns="0" tIns="0" bIns="0" anchor="t">
-            <a:spAutoFit/>
-          </a:bodyPr>
-          <a:lstStyle/>
-          <a:p>
-            <a:pPr algn="r">
-              <a:spcAft>
-                <a:spcPts val="600"/>
-              </a:spcAft>
-            </a:pPr>
-            <a:r>
               <a:rPr sz="1100" b="0" i="0">
                 <a:solidFill>
                   <a:srgbClr val="4F5C75"/>
                 </a:solidFill>
                 <a:latin typeface="Calibri"/>
               </a:rPr>
-              <a:t>Guía 1 · Ritmo  ·  10 de 13</a:t>
+              <a:t>Guía 1 · Ritmo  ·  10 de 14</a:t>
             </a:r>
           </a:p>
         </p:txBody>
@@ -5254,27 +5778,29 @@
                 </a:solidFill>
                 <a:latin typeface="Cambria"/>
               </a:rPr>
-              <a:t>Reto: escribe tu propia partitura</a:t>
-            </a:r>
-          </a:p>
-        </p:txBody>
-      </p:sp>
-      <p:sp>
-        <p:nvSpPr>
-          <p:cNvPr id="4" name="Oval 3"/>
+              <a:t>Lo difícil: notas sostenidas y acordes</a:t>
+            </a:r>
+          </a:p>
+        </p:txBody>
+      </p:sp>
+      <p:sp>
+        <p:nvSpPr>
+          <p:cNvPr id="4" name="Rounded Rectangle 3"/>
           <p:cNvSpPr/>
           <p:nvPr/>
         </p:nvSpPr>
         <p:spPr>
           <a:xfrm>
-            <a:off x="548640" y="1645920"/>
-            <a:ext cx="347472" cy="347472"/>
-          </a:xfrm>
-          <a:prstGeom prst="ellipse">
-            <a:avLst/>
+            <a:off x="512063" y="1609344"/>
+            <a:ext cx="5559552" cy="3159252"/>
+          </a:xfrm>
+          <a:prstGeom prst="roundRect">
+            <a:avLst>
+              <a:gd name="adj" fmla="val 3000"/>
+            </a:avLst>
           </a:prstGeom>
           <a:solidFill>
-            <a:srgbClr val="7317C9"/>
+            <a:srgbClr val="070B18"/>
           </a:solidFill>
           <a:ln>
             <a:noFill/>
@@ -5296,32 +5822,45 @@
           </a:fontRef>
         </p:style>
         <p:txBody>
-          <a:bodyPr rtlCol="0" anchor="ctr" lIns="0" rIns="0" tIns="0" bIns="0"/>
-          <a:lstStyle/>
-          <a:p>
-            <a:pPr algn="ctr"/>
-            <a:r>
-              <a:rPr sz="1300" b="1">
-                <a:solidFill>
-                  <a:srgbClr val="FFFFFF"/>
-                </a:solidFill>
-                <a:latin typeface="Calibri"/>
-              </a:rPr>
-              <a:t>1</a:t>
-            </a:r>
-          </a:p>
-        </p:txBody>
-      </p:sp>
-      <p:sp>
-        <p:nvSpPr>
-          <p:cNvPr id="5" name="TextBox 4"/>
+          <a:bodyPr rtlCol="0" anchor="ctr"/>
+          <a:lstStyle/>
+          <a:p/>
+        </p:txBody>
+      </p:sp>
+      <p:pic>
+        <p:nvPicPr>
+          <p:cNvPr id="5" name="Picture 4" descr="r02_sostenidas.png"/>
+          <p:cNvPicPr>
+            <a:picLocks noChangeAspect="1"/>
+          </p:cNvPicPr>
+          <p:nvPr/>
+        </p:nvPicPr>
+        <p:blipFill>
+          <a:blip r:embed="rId2"/>
+          <a:stretch>
+            <a:fillRect/>
+          </a:stretch>
+        </p:blipFill>
+        <p:spPr>
+          <a:xfrm>
+            <a:off x="548640" y="1645920"/>
+            <a:ext cx="5486400" cy="3086100"/>
+          </a:xfrm>
+          <a:prstGeom prst="rect">
+            <a:avLst/>
+          </a:prstGeom>
+        </p:spPr>
+      </p:pic>
+      <p:sp>
+        <p:nvSpPr>
+          <p:cNvPr id="6" name="TextBox 5"/>
           <p:cNvSpPr txBox="1"/>
           <p:nvPr/>
         </p:nvSpPr>
         <p:spPr>
           <a:xfrm>
-            <a:off x="1051560" y="1664208"/>
-            <a:ext cx="5349240" cy="502920"/>
+            <a:off x="548640" y="4841748"/>
+            <a:ext cx="5486400" cy="320040"/>
           </a:xfrm>
           <a:prstGeom prst="rect">
             <a:avLst/>
@@ -5340,51 +5879,35 @@
               </a:spcAft>
             </a:pPr>
             <a:r>
-              <a:rPr sz="1500" b="0" i="0">
-                <a:solidFill>
-                  <a:srgbClr val="0A0E1A"/>
-                </a:solidFill>
-                <a:latin typeface="Calibri"/>
-              </a:rPr>
-              <a:t>En Project, clic derecho en Ritmo/Partituras &gt; </a:t>
-            </a:r>
-            <a:r>
-              <a:rPr sz="1500" b="1" i="0">
-                <a:solidFill>
-                  <a:srgbClr val="0A0E1A"/>
-                </a:solidFill>
-                <a:latin typeface="Calibri"/>
-              </a:rPr>
-              <a:t>Show in Explorer</a:t>
-            </a:r>
-            <a:r>
-              <a:rPr sz="1500" b="0" i="0">
-                <a:solidFill>
-                  <a:srgbClr val="0A0E1A"/>
-                </a:solidFill>
-                <a:latin typeface="Calibri"/>
-              </a:rPr>
-              <a:t>.</a:t>
-            </a:r>
-          </a:p>
-        </p:txBody>
-      </p:sp>
-      <p:sp>
-        <p:nvSpPr>
-          <p:cNvPr id="6" name="Oval 5"/>
+              <a:rPr sz="1200" b="0" i="0">
+                <a:solidFill>
+                  <a:srgbClr val="4F5C75"/>
+                </a:solidFill>
+                <a:latin typeface="Calibri"/>
+              </a:rPr>
+              <a:t>Sección 3: la cola es lo que hay que sostener.</a:t>
+            </a:r>
+          </a:p>
+        </p:txBody>
+      </p:sp>
+      <p:sp>
+        <p:nvSpPr>
+          <p:cNvPr id="7" name="Rounded Rectangle 6"/>
           <p:cNvSpPr/>
           <p:nvPr/>
         </p:nvSpPr>
         <p:spPr>
           <a:xfrm>
-            <a:off x="548640" y="2423160"/>
-            <a:ext cx="347472" cy="347472"/>
-          </a:xfrm>
-          <a:prstGeom prst="ellipse">
-            <a:avLst/>
+            <a:off x="6135624" y="1609344"/>
+            <a:ext cx="5559552" cy="3159252"/>
+          </a:xfrm>
+          <a:prstGeom prst="roundRect">
+            <a:avLst>
+              <a:gd name="adj" fmla="val 3000"/>
+            </a:avLst>
           </a:prstGeom>
           <a:solidFill>
-            <a:srgbClr val="7317C9"/>
+            <a:srgbClr val="070B18"/>
           </a:solidFill>
           <a:ln>
             <a:noFill/>
@@ -5406,32 +5929,45 @@
           </a:fontRef>
         </p:style>
         <p:txBody>
-          <a:bodyPr rtlCol="0" anchor="ctr" lIns="0" rIns="0" tIns="0" bIns="0"/>
-          <a:lstStyle/>
-          <a:p>
-            <a:pPr algn="ctr"/>
-            <a:r>
-              <a:rPr sz="1300" b="1">
-                <a:solidFill>
-                  <a:srgbClr val="FFFFFF"/>
-                </a:solidFill>
-                <a:latin typeface="Calibri"/>
-              </a:rPr>
-              <a:t>2</a:t>
-            </a:r>
-          </a:p>
-        </p:txBody>
-      </p:sp>
-      <p:sp>
-        <p:nvSpPr>
-          <p:cNvPr id="7" name="TextBox 6"/>
+          <a:bodyPr rtlCol="0" anchor="ctr"/>
+          <a:lstStyle/>
+          <a:p/>
+        </p:txBody>
+      </p:sp>
+      <p:pic>
+        <p:nvPicPr>
+          <p:cNvPr id="8" name="Picture 7" descr="r02_acordes.png"/>
+          <p:cNvPicPr>
+            <a:picLocks noChangeAspect="1"/>
+          </p:cNvPicPr>
+          <p:nvPr/>
+        </p:nvPicPr>
+        <p:blipFill>
+          <a:blip r:embed="rId3"/>
+          <a:stretch>
+            <a:fillRect/>
+          </a:stretch>
+        </p:blipFill>
+        <p:spPr>
+          <a:xfrm>
+            <a:off x="6172200" y="1645920"/>
+            <a:ext cx="5486400" cy="3086100"/>
+          </a:xfrm>
+          <a:prstGeom prst="rect">
+            <a:avLst/>
+          </a:prstGeom>
+        </p:spPr>
+      </p:pic>
+      <p:sp>
+        <p:nvSpPr>
+          <p:cNvPr id="9" name="TextBox 8"/>
           <p:cNvSpPr txBox="1"/>
           <p:nvPr/>
         </p:nvSpPr>
         <p:spPr>
           <a:xfrm>
-            <a:off x="1051560" y="2441448"/>
-            <a:ext cx="5349240" cy="502920"/>
+            <a:off x="6172200" y="4841748"/>
+            <a:ext cx="5486400" cy="320040"/>
           </a:xfrm>
           <a:prstGeom prst="rect">
             <a:avLst/>
@@ -5450,80 +5986,27 @@
               </a:spcAft>
             </a:pPr>
             <a:r>
-              <a:rPr sz="1500" b="0" i="0">
-                <a:solidFill>
-                  <a:srgbClr val="0A0E1A"/>
-                </a:solidFill>
-                <a:latin typeface="Calibri"/>
-              </a:rPr>
-              <a:t>Copia Rock.txt y llámala MiRock.txt. Ábrela con el Bloc de notas.</a:t>
-            </a:r>
-          </a:p>
-        </p:txBody>
-      </p:sp>
-      <p:sp>
-        <p:nvSpPr>
-          <p:cNvPr id="8" name="Oval 7"/>
-          <p:cNvSpPr/>
-          <p:nvPr/>
-        </p:nvSpPr>
-        <p:spPr>
-          <a:xfrm>
-            <a:off x="548640" y="3200400"/>
-            <a:ext cx="347472" cy="347472"/>
-          </a:xfrm>
-          <a:prstGeom prst="ellipse">
-            <a:avLst/>
-          </a:prstGeom>
-          <a:solidFill>
-            <a:srgbClr val="7317C9"/>
-          </a:solidFill>
-          <a:ln>
-            <a:noFill/>
-          </a:ln>
-          <a:effectLst/>
-        </p:spPr>
-        <p:style>
-          <a:lnRef idx="1">
-            <a:schemeClr val="accent1"/>
-          </a:lnRef>
-          <a:fillRef idx="3">
-            <a:schemeClr val="accent1"/>
-          </a:fillRef>
-          <a:effectRef idx="2">
-            <a:schemeClr val="accent1"/>
-          </a:effectRef>
-          <a:fontRef idx="minor">
-            <a:schemeClr val="lt1"/>
-          </a:fontRef>
-        </p:style>
-        <p:txBody>
-          <a:bodyPr rtlCol="0" anchor="ctr" lIns="0" rIns="0" tIns="0" bIns="0"/>
-          <a:lstStyle/>
-          <a:p>
-            <a:pPr algn="ctr"/>
-            <a:r>
-              <a:rPr sz="1300" b="1">
-                <a:solidFill>
-                  <a:srgbClr val="FFFFFF"/>
-                </a:solidFill>
-                <a:latin typeface="Calibri"/>
-              </a:rPr>
-              <a:t>3</a:t>
-            </a:r>
-          </a:p>
-        </p:txBody>
-      </p:sp>
-      <p:sp>
-        <p:nvSpPr>
-          <p:cNvPr id="9" name="TextBox 8"/>
+              <a:rPr sz="1200" b="0" i="0">
+                <a:solidFill>
+                  <a:srgbClr val="4F5C75"/>
+                </a:solidFill>
+                <a:latin typeface="Calibri"/>
+              </a:rPr>
+              <a:t>Sección 4: tecla y clic en el mismo pulso.</a:t>
+            </a:r>
+          </a:p>
+        </p:txBody>
+      </p:sp>
+      <p:sp>
+        <p:nvSpPr>
+          <p:cNvPr id="10" name="TextBox 9"/>
           <p:cNvSpPr txBox="1"/>
           <p:nvPr/>
         </p:nvSpPr>
         <p:spPr>
           <a:xfrm>
-            <a:off x="1051560" y="3218688"/>
-            <a:ext cx="5349240" cy="502920"/>
+            <a:off x="548640" y="5280659"/>
+            <a:ext cx="5486400" cy="1463040"/>
           </a:xfrm>
           <a:prstGeom prst="rect">
             <a:avLst/>
@@ -5542,66 +6025,22 @@
               </a:spcAft>
             </a:pPr>
             <a:r>
-              <a:rPr sz="1500" b="0" i="0">
-                <a:solidFill>
-                  <a:srgbClr val="0A0E1A"/>
-                </a:solidFill>
-                <a:latin typeface="Calibri"/>
-              </a:rPr>
-              <a:t>Cambia notas, guarda, y vuelve a Unity: se actualiza sola.</a:t>
-            </a:r>
-          </a:p>
-        </p:txBody>
-      </p:sp>
-      <p:sp>
-        <p:nvSpPr>
-          <p:cNvPr id="10" name="Oval 9"/>
-          <p:cNvSpPr/>
-          <p:nvPr/>
-        </p:nvSpPr>
-        <p:spPr>
-          <a:xfrm>
-            <a:off x="548640" y="3977639"/>
-            <a:ext cx="347472" cy="347472"/>
-          </a:xfrm>
-          <a:prstGeom prst="ellipse">
-            <a:avLst/>
-          </a:prstGeom>
-          <a:solidFill>
-            <a:srgbClr val="7317C9"/>
-          </a:solidFill>
-          <a:ln>
-            <a:noFill/>
-          </a:ln>
-          <a:effectLst/>
-        </p:spPr>
-        <p:style>
-          <a:lnRef idx="1">
-            <a:schemeClr val="accent1"/>
-          </a:lnRef>
-          <a:fillRef idx="3">
-            <a:schemeClr val="accent1"/>
-          </a:fillRef>
-          <a:effectRef idx="2">
-            <a:schemeClr val="accent1"/>
-          </a:effectRef>
-          <a:fontRef idx="minor">
-            <a:schemeClr val="lt1"/>
-          </a:fontRef>
-        </p:style>
-        <p:txBody>
-          <a:bodyPr rtlCol="0" anchor="ctr" lIns="0" rIns="0" tIns="0" bIns="0"/>
-          <a:lstStyle/>
-          <a:p>
-            <a:pPr algn="ctr"/>
-            <a:r>
-              <a:rPr sz="1300" b="1">
-                <a:solidFill>
-                  <a:srgbClr val="FFFFFF"/>
-                </a:solidFill>
-                <a:latin typeface="Calibri"/>
-              </a:rPr>
-              <a:t>4</a:t>
+              <a:rPr sz="1400" b="1" i="0">
+                <a:solidFill>
+                  <a:srgbClr val="0A0E1A"/>
+                </a:solidFill>
+                <a:latin typeface="Calibri"/>
+              </a:rPr>
+              <a:t>Sostenida: </a:t>
+            </a:r>
+            <a:r>
+              <a:rPr sz="1400" b="0" i="0">
+                <a:solidFill>
+                  <a:srgbClr val="0A0E1A"/>
+                </a:solidFill>
+                <a:latin typeface="Calibri"/>
+              </a:rPr>
+              <a:t>se aprieta a tiempo y se suelta al final de la cola. Si sueltas antes, dice Soltaste y se pierde el combo.</a:t>
             </a:r>
           </a:p>
         </p:txBody>
@@ -5614,8 +6053,8 @@
         </p:nvSpPr>
         <p:spPr>
           <a:xfrm>
-            <a:off x="1051560" y="3995927"/>
-            <a:ext cx="5349240" cy="502920"/>
+            <a:off x="6172200" y="5280659"/>
+            <a:ext cx="5486400" cy="1463040"/>
           </a:xfrm>
           <a:prstGeom prst="rect">
             <a:avLst/>
@@ -5634,91 +6073,36 @@
               </a:spcAft>
             </a:pPr>
             <a:r>
-              <a:rPr sz="1500" b="0" i="0">
-                <a:solidFill>
-                  <a:srgbClr val="0A0E1A"/>
-                </a:solidFill>
-                <a:latin typeface="Calibri"/>
-              </a:rPr>
-              <a:t>En Musica Por Genero, cambia la </a:t>
-            </a:r>
-            <a:r>
-              <a:rPr sz="1500" b="1" i="0">
-                <a:solidFill>
-                  <a:srgbClr val="0A0E1A"/>
-                </a:solidFill>
-                <a:latin typeface="Calibri"/>
-              </a:rPr>
-              <a:t>Partitura</a:t>
-            </a:r>
-            <a:r>
-              <a:rPr sz="1500" b="0" i="0">
-                <a:solidFill>
-                  <a:srgbClr val="0A0E1A"/>
-                </a:solidFill>
-                <a:latin typeface="Calibri"/>
-              </a:rPr>
-              <a:t> de Rock por MiRock.</a:t>
-            </a:r>
-          </a:p>
-        </p:txBody>
-      </p:sp>
-      <p:sp>
-        <p:nvSpPr>
-          <p:cNvPr id="12" name="Rounded Rectangle 11"/>
-          <p:cNvSpPr/>
-          <p:nvPr/>
-        </p:nvSpPr>
-        <p:spPr>
-          <a:xfrm>
-            <a:off x="6766560" y="1645920"/>
-            <a:ext cx="4892040" cy="2971800"/>
-          </a:xfrm>
-          <a:prstGeom prst="roundRect">
-            <a:avLst>
-              <a:gd name="adj" fmla="val 6000"/>
-            </a:avLst>
-          </a:prstGeom>
-          <a:solidFill>
-            <a:srgbClr val="FFFFFF"/>
-          </a:solidFill>
-          <a:ln w="12700">
-            <a:solidFill>
-              <a:srgbClr val="D2DAE9"/>
-            </a:solidFill>
-          </a:ln>
-          <a:effectLst/>
-        </p:spPr>
-        <p:style>
-          <a:lnRef idx="1">
-            <a:schemeClr val="accent1"/>
-          </a:lnRef>
-          <a:fillRef idx="3">
-            <a:schemeClr val="accent1"/>
-          </a:fillRef>
-          <a:effectRef idx="2">
-            <a:schemeClr val="accent1"/>
-          </a:effectRef>
-          <a:fontRef idx="minor">
-            <a:schemeClr val="lt1"/>
-          </a:fontRef>
-        </p:style>
-        <p:txBody>
-          <a:bodyPr rtlCol="0" anchor="ctr"/>
-          <a:lstStyle/>
-          <a:p/>
-        </p:txBody>
-      </p:sp>
-      <p:sp>
-        <p:nvSpPr>
-          <p:cNvPr id="13" name="TextBox 12"/>
+              <a:rPr sz="1400" b="1" i="0">
+                <a:solidFill>
+                  <a:srgbClr val="0A0E1A"/>
+                </a:solidFill>
+                <a:latin typeface="Calibri"/>
+              </a:rPr>
+              <a:t>Acorde: </a:t>
+            </a:r>
+            <a:r>
+              <a:rPr sz="1400" b="0" i="0">
+                <a:solidFill>
+                  <a:srgbClr val="0A0E1A"/>
+                </a:solidFill>
+                <a:latin typeface="Calibri"/>
+              </a:rPr>
+              <a:t>dos notas en el mismo pulso. Cada una se califica por separado, así que las dos manos tienen que llegar juntas.</a:t>
+            </a:r>
+          </a:p>
+        </p:txBody>
+      </p:sp>
+      <p:sp>
+        <p:nvSpPr>
+          <p:cNvPr id="12" name="Pie"/>
           <p:cNvSpPr txBox="1"/>
           <p:nvPr/>
         </p:nvSpPr>
         <p:spPr>
           <a:xfrm>
-            <a:off x="6995160" y="1783080"/>
-            <a:ext cx="4480560" cy="2743200"/>
+            <a:off x="548640" y="6400800"/>
+            <a:ext cx="11064240" cy="274320"/>
           </a:xfrm>
           <a:prstGeom prst="rect">
             <a:avLst/>
@@ -5731,192 +6115,6 @@
           </a:bodyPr>
           <a:lstStyle/>
           <a:p>
-            <a:pPr algn="l">
-              <a:spcAft>
-                <a:spcPts val="800"/>
-              </a:spcAft>
-            </a:pPr>
-            <a:r>
-              <a:rPr sz="1400" b="1" i="0">
-                <a:solidFill>
-                  <a:srgbClr val="0A0E1A"/>
-                </a:solidFill>
-                <a:latin typeface="Calibri"/>
-              </a:rPr>
-              <a:t>Cuentas que sirven</a:t>
-            </a:r>
-          </a:p>
-          <a:p>
-            <a:pPr algn="l">
-              <a:spcAft>
-                <a:spcPts val="800"/>
-              </a:spcAft>
-            </a:pPr>
-            <a:r>
-              <a:rPr sz="1400" b="0" i="0">
-                <a:solidFill>
-                  <a:srgbClr val="0A0E1A"/>
-                </a:solidFill>
-                <a:latin typeface="Calibri"/>
-              </a:rPr>
-              <a:t>A 120 BPM, un pulso dura medio segundo. Un compás son 4 pulsos.</a:t>
-            </a:r>
-          </a:p>
-          <a:p>
-            <a:pPr algn="l">
-              <a:spcAft>
-                <a:spcPts val="800"/>
-              </a:spcAft>
-            </a:pPr>
-            <a:r>
-              <a:rPr sz="1400" b="0" i="0">
-                <a:solidFill>
-                  <a:srgbClr val="0A0E1A"/>
-                </a:solidFill>
-                <a:latin typeface="Calibri"/>
-              </a:rPr>
-              <a:t>Rock tiene 128 pulsos; deja vacíos los últimos 8.</a:t>
-            </a:r>
-          </a:p>
-          <a:p>
-            <a:pPr algn="l">
-              <a:spcAft>
-                <a:spcPts val="800"/>
-              </a:spcAft>
-            </a:pPr>
-            <a:r>
-              <a:rPr sz="1400" b="0" i="0">
-                <a:solidFill>
-                  <a:srgbClr val="0A0E1A"/>
-                </a:solidFill>
-                <a:latin typeface="Calibri"/>
-              </a:rPr>
-              <a:t>Se pueden usar medios pulsos: 9.5 es una corchea.</a:t>
-            </a:r>
-          </a:p>
-        </p:txBody>
-      </p:sp>
-      <p:sp>
-        <p:nvSpPr>
-          <p:cNvPr id="14" name="Rounded Rectangle 13"/>
-          <p:cNvSpPr/>
-          <p:nvPr/>
-        </p:nvSpPr>
-        <p:spPr>
-          <a:xfrm>
-            <a:off x="6766560" y="4800600"/>
-            <a:ext cx="4892040" cy="1417320"/>
-          </a:xfrm>
-          <a:prstGeom prst="roundRect">
-            <a:avLst>
-              <a:gd name="adj" fmla="val 8000"/>
-            </a:avLst>
-          </a:prstGeom>
-          <a:solidFill>
-            <a:srgbClr val="FCF1DC"/>
-          </a:solidFill>
-          <a:ln>
-            <a:noFill/>
-          </a:ln>
-          <a:effectLst/>
-        </p:spPr>
-        <p:style>
-          <a:lnRef idx="1">
-            <a:schemeClr val="accent1"/>
-          </a:lnRef>
-          <a:fillRef idx="3">
-            <a:schemeClr val="accent1"/>
-          </a:fillRef>
-          <a:effectRef idx="2">
-            <a:schemeClr val="accent1"/>
-          </a:effectRef>
-          <a:fontRef idx="minor">
-            <a:schemeClr val="lt1"/>
-          </a:fontRef>
-        </p:style>
-        <p:txBody>
-          <a:bodyPr rtlCol="0" anchor="ctr"/>
-          <a:lstStyle/>
-          <a:p/>
-        </p:txBody>
-      </p:sp>
-      <p:sp>
-        <p:nvSpPr>
-          <p:cNvPr id="15" name="TextBox 14"/>
-          <p:cNvSpPr txBox="1"/>
-          <p:nvPr/>
-        </p:nvSpPr>
-        <p:spPr>
-          <a:xfrm>
-            <a:off x="6995160" y="4965192"/>
-            <a:ext cx="4434840" cy="1143000"/>
-          </a:xfrm>
-          <a:prstGeom prst="rect">
-            <a:avLst/>
-          </a:prstGeom>
-          <a:noFill/>
-        </p:spPr>
-        <p:txBody>
-          <a:bodyPr wrap="square" lIns="0" rIns="0" tIns="0" bIns="0" anchor="t">
-            <a:spAutoFit/>
-          </a:bodyPr>
-          <a:lstStyle/>
-          <a:p>
-            <a:pPr algn="l">
-              <a:spcAft>
-                <a:spcPts val="400"/>
-              </a:spcAft>
-            </a:pPr>
-            <a:r>
-              <a:rPr sz="1300" b="1" i="0">
-                <a:solidFill>
-                  <a:srgbClr val="875A00"/>
-                </a:solidFill>
-                <a:latin typeface="Calibri"/>
-              </a:rPr>
-              <a:t>!  El decimal es punto</a:t>
-            </a:r>
-          </a:p>
-          <a:p>
-            <a:pPr algn="l">
-              <a:spcAft>
-                <a:spcPts val="400"/>
-              </a:spcAft>
-            </a:pPr>
-            <a:r>
-              <a:rPr sz="1300" b="0" i="0">
-                <a:solidFill>
-                  <a:srgbClr val="0A0E1A"/>
-                </a:solidFill>
-                <a:latin typeface="Calibri"/>
-              </a:rPr>
-              <a:t>En la partitura se escribe 9.5 y no 9,5, aunque Windows esté en español.</a:t>
-            </a:r>
-          </a:p>
-        </p:txBody>
-      </p:sp>
-      <p:sp>
-        <p:nvSpPr>
-          <p:cNvPr id="16" name="Pie"/>
-          <p:cNvSpPr txBox="1"/>
-          <p:nvPr/>
-        </p:nvSpPr>
-        <p:spPr>
-          <a:xfrm>
-            <a:off x="548640" y="6400800"/>
-            <a:ext cx="11064240" cy="274320"/>
-          </a:xfrm>
-          <a:prstGeom prst="rect">
-            <a:avLst/>
-          </a:prstGeom>
-          <a:noFill/>
-        </p:spPr>
-        <p:txBody>
-          <a:bodyPr wrap="square" lIns="0" rIns="0" tIns="0" bIns="0" anchor="t">
-            <a:spAutoFit/>
-          </a:bodyPr>
-          <a:lstStyle/>
-          <a:p>
             <a:pPr algn="r">
               <a:spcAft>
                 <a:spcPts val="600"/>
@@ -5929,7 +6127,7 @@
                 </a:solidFill>
                 <a:latin typeface="Calibri"/>
               </a:rPr>
-              <a:t>Guía 1 · Ritmo  ·  11 de 13</a:t>
+              <a:t>Guía 1 · Ritmo  ·  11 de 14</a:t>
             </a:r>
           </a:p>
         </p:txBody>
@@ -6033,29 +6231,27 @@
                 </a:solidFill>
                 <a:latin typeface="Cambria"/>
               </a:rPr>
-              <a:t>Los datos y los errores más comunes</a:t>
-            </a:r>
-          </a:p>
-        </p:txBody>
-      </p:sp>
-      <p:sp>
-        <p:nvSpPr>
-          <p:cNvPr id="4" name="Rounded Rectangle 3"/>
+              <a:t>Reto: escribe tu propia partitura</a:t>
+            </a:r>
+          </a:p>
+        </p:txBody>
+      </p:sp>
+      <p:sp>
+        <p:nvSpPr>
+          <p:cNvPr id="4" name="Oval 3"/>
           <p:cNvSpPr/>
           <p:nvPr/>
         </p:nvSpPr>
         <p:spPr>
           <a:xfrm>
             <a:off x="548640" y="1645920"/>
-            <a:ext cx="11109960" cy="1097280"/>
-          </a:xfrm>
-          <a:prstGeom prst="roundRect">
-            <a:avLst>
-              <a:gd name="adj" fmla="val 5000"/>
-            </a:avLst>
+            <a:ext cx="347472" cy="347472"/>
+          </a:xfrm>
+          <a:prstGeom prst="ellipse">
+            <a:avLst/>
           </a:prstGeom>
           <a:solidFill>
-            <a:srgbClr val="0F1424"/>
+            <a:srgbClr val="7317C9"/>
           </a:solidFill>
           <a:ln>
             <a:noFill/>
@@ -6077,9 +6273,20 @@
           </a:fontRef>
         </p:style>
         <p:txBody>
-          <a:bodyPr rtlCol="0" anchor="ctr"/>
-          <a:lstStyle/>
-          <a:p/>
+          <a:bodyPr rtlCol="0" anchor="ctr" lIns="0" rIns="0" tIns="0" bIns="0"/>
+          <a:lstStyle/>
+          <a:p>
+            <a:pPr algn="ctr"/>
+            <a:r>
+              <a:rPr sz="1300" b="1">
+                <a:solidFill>
+                  <a:srgbClr val="FFFFFF"/>
+                </a:solidFill>
+                <a:latin typeface="Calibri"/>
+              </a:rPr>
+              <a:t>1</a:t>
+            </a:r>
+          </a:p>
         </p:txBody>
       </p:sp>
       <p:sp>
@@ -6090,8 +6297,8 @@
         </p:nvSpPr>
         <p:spPr>
           <a:xfrm>
-            <a:off x="777240" y="1828800"/>
-            <a:ext cx="10652760" cy="822959"/>
+            <a:off x="1051560" y="1664208"/>
+            <a:ext cx="5349240" cy="502920"/>
           </a:xfrm>
           <a:prstGeom prst="rect">
             <a:avLst/>
@@ -6106,47 +6313,102 @@
           <a:p>
             <a:pPr algn="l">
               <a:spcAft>
-                <a:spcPts val="200"/>
-              </a:spcAft>
-            </a:pPr>
-            <a:r>
-              <a:rPr sz="1200" b="0" i="0">
-                <a:solidFill>
-                  <a:srgbClr val="E9EEFB"/>
-                </a:solidFill>
-                <a:latin typeface="Consolas"/>
-              </a:rPr>
-              <a:t>fecha;mano;sensibilidad;genero;puntaje;precisionPct;errorPromedioMs;perfectos;buenos;fallos;sostenidasCompletas</a:t>
-            </a:r>
-          </a:p>
-          <a:p>
-            <a:pPr algn="l">
-              <a:spcAft>
-                <a:spcPts val="200"/>
-              </a:spcAft>
-            </a:pPr>
-            <a:r>
-              <a:rPr sz="1200" b="0" i="0">
-                <a:solidFill>
-                  <a:srgbClr val="E9EEFB"/>
-                </a:solidFill>
-                <a:latin typeface="Consolas"/>
-              </a:rPr>
-              <a:t>2026-10-21 08:29:54;Derecha;1,00;Electronica;122900;100,0;6;112;0;0;7</a:t>
-            </a:r>
-          </a:p>
-        </p:txBody>
-      </p:sp>
-      <p:sp>
-        <p:nvSpPr>
-          <p:cNvPr id="6" name="TextBox 5"/>
+                <a:spcPts val="600"/>
+              </a:spcAft>
+            </a:pPr>
+            <a:r>
+              <a:rPr sz="1500" b="0" i="0">
+                <a:solidFill>
+                  <a:srgbClr val="0A0E1A"/>
+                </a:solidFill>
+                <a:latin typeface="Calibri"/>
+              </a:rPr>
+              <a:t>En Project, clic derecho en Ritmo/Partituras &gt; </a:t>
+            </a:r>
+            <a:r>
+              <a:rPr sz="1500" b="1" i="0">
+                <a:solidFill>
+                  <a:srgbClr val="0A0E1A"/>
+                </a:solidFill>
+                <a:latin typeface="Calibri"/>
+              </a:rPr>
+              <a:t>Show in Explorer</a:t>
+            </a:r>
+            <a:r>
+              <a:rPr sz="1500" b="0" i="0">
+                <a:solidFill>
+                  <a:srgbClr val="0A0E1A"/>
+                </a:solidFill>
+                <a:latin typeface="Calibri"/>
+              </a:rPr>
+              <a:t>.</a:t>
+            </a:r>
+          </a:p>
+        </p:txBody>
+      </p:sp>
+      <p:sp>
+        <p:nvSpPr>
+          <p:cNvPr id="6" name="Oval 5"/>
+          <p:cNvSpPr/>
+          <p:nvPr/>
+        </p:nvSpPr>
+        <p:spPr>
+          <a:xfrm>
+            <a:off x="548640" y="2423160"/>
+            <a:ext cx="347472" cy="347472"/>
+          </a:xfrm>
+          <a:prstGeom prst="ellipse">
+            <a:avLst/>
+          </a:prstGeom>
+          <a:solidFill>
+            <a:srgbClr val="7317C9"/>
+          </a:solidFill>
+          <a:ln>
+            <a:noFill/>
+          </a:ln>
+          <a:effectLst/>
+        </p:spPr>
+        <p:style>
+          <a:lnRef idx="1">
+            <a:schemeClr val="accent1"/>
+          </a:lnRef>
+          <a:fillRef idx="3">
+            <a:schemeClr val="accent1"/>
+          </a:fillRef>
+          <a:effectRef idx="2">
+            <a:schemeClr val="accent1"/>
+          </a:effectRef>
+          <a:fontRef idx="minor">
+            <a:schemeClr val="lt1"/>
+          </a:fontRef>
+        </p:style>
+        <p:txBody>
+          <a:bodyPr rtlCol="0" anchor="ctr" lIns="0" rIns="0" tIns="0" bIns="0"/>
+          <a:lstStyle/>
+          <a:p>
+            <a:pPr algn="ctr"/>
+            <a:r>
+              <a:rPr sz="1300" b="1">
+                <a:solidFill>
+                  <a:srgbClr val="FFFFFF"/>
+                </a:solidFill>
+                <a:latin typeface="Calibri"/>
+              </a:rPr>
+              <a:t>2</a:t>
+            </a:r>
+          </a:p>
+        </p:txBody>
+      </p:sp>
+      <p:sp>
+        <p:nvSpPr>
+          <p:cNvPr id="7" name="TextBox 6"/>
           <p:cNvSpPr txBox="1"/>
           <p:nvPr/>
         </p:nvSpPr>
         <p:spPr>
           <a:xfrm>
-            <a:off x="548640" y="2834640"/>
-            <a:ext cx="11064240" cy="365760"/>
+            <a:off x="1051560" y="2441448"/>
+            <a:ext cx="5349240" cy="502920"/>
           </a:xfrm>
           <a:prstGeom prst="rect">
             <a:avLst/>
@@ -6165,36 +6427,229 @@
               </a:spcAft>
             </a:pPr>
             <a:r>
-              <a:rPr sz="1300" b="0" i="0">
-                <a:solidFill>
-                  <a:srgbClr val="4F5C75"/>
-                </a:solidFill>
-                <a:latin typeface="Consolas"/>
-              </a:rPr>
-              <a:t>resultados_Ritmo.csv</a:t>
-            </a:r>
-            <a:r>
-              <a:rPr sz="1300" b="0" i="0">
-                <a:solidFill>
-                  <a:srgbClr val="4F5C75"/>
-                </a:solidFill>
-                <a:latin typeface="Calibri"/>
-              </a:rPr>
-              <a:t>, en AppData\LocalLow\&lt;empresa&gt;\&lt;proyecto&gt;. Se abre con doble clic en Excel. Esta fila es real.</a:t>
-            </a:r>
-          </a:p>
-        </p:txBody>
-      </p:sp>
-      <p:sp>
-        <p:nvSpPr>
-          <p:cNvPr id="7" name="Rounded Rectangle 6"/>
+              <a:rPr sz="1500" b="0" i="0">
+                <a:solidFill>
+                  <a:srgbClr val="0A0E1A"/>
+                </a:solidFill>
+                <a:latin typeface="Calibri"/>
+              </a:rPr>
+              <a:t>Copia Rock.txt y llámala MiRock.txt. Ábrela con el Bloc de notas.</a:t>
+            </a:r>
+          </a:p>
+        </p:txBody>
+      </p:sp>
+      <p:sp>
+        <p:nvSpPr>
+          <p:cNvPr id="8" name="Oval 7"/>
           <p:cNvSpPr/>
           <p:nvPr/>
         </p:nvSpPr>
         <p:spPr>
           <a:xfrm>
-            <a:off x="548640" y="3383280"/>
-            <a:ext cx="5440680" cy="1298448"/>
+            <a:off x="548640" y="3200400"/>
+            <a:ext cx="347472" cy="347472"/>
+          </a:xfrm>
+          <a:prstGeom prst="ellipse">
+            <a:avLst/>
+          </a:prstGeom>
+          <a:solidFill>
+            <a:srgbClr val="7317C9"/>
+          </a:solidFill>
+          <a:ln>
+            <a:noFill/>
+          </a:ln>
+          <a:effectLst/>
+        </p:spPr>
+        <p:style>
+          <a:lnRef idx="1">
+            <a:schemeClr val="accent1"/>
+          </a:lnRef>
+          <a:fillRef idx="3">
+            <a:schemeClr val="accent1"/>
+          </a:fillRef>
+          <a:effectRef idx="2">
+            <a:schemeClr val="accent1"/>
+          </a:effectRef>
+          <a:fontRef idx="minor">
+            <a:schemeClr val="lt1"/>
+          </a:fontRef>
+        </p:style>
+        <p:txBody>
+          <a:bodyPr rtlCol="0" anchor="ctr" lIns="0" rIns="0" tIns="0" bIns="0"/>
+          <a:lstStyle/>
+          <a:p>
+            <a:pPr algn="ctr"/>
+            <a:r>
+              <a:rPr sz="1300" b="1">
+                <a:solidFill>
+                  <a:srgbClr val="FFFFFF"/>
+                </a:solidFill>
+                <a:latin typeface="Calibri"/>
+              </a:rPr>
+              <a:t>3</a:t>
+            </a:r>
+          </a:p>
+        </p:txBody>
+      </p:sp>
+      <p:sp>
+        <p:nvSpPr>
+          <p:cNvPr id="9" name="TextBox 8"/>
+          <p:cNvSpPr txBox="1"/>
+          <p:nvPr/>
+        </p:nvSpPr>
+        <p:spPr>
+          <a:xfrm>
+            <a:off x="1051560" y="3218688"/>
+            <a:ext cx="5349240" cy="502920"/>
+          </a:xfrm>
+          <a:prstGeom prst="rect">
+            <a:avLst/>
+          </a:prstGeom>
+          <a:noFill/>
+        </p:spPr>
+        <p:txBody>
+          <a:bodyPr wrap="square" lIns="0" rIns="0" tIns="0" bIns="0" anchor="t">
+            <a:spAutoFit/>
+          </a:bodyPr>
+          <a:lstStyle/>
+          <a:p>
+            <a:pPr algn="l">
+              <a:spcAft>
+                <a:spcPts val="600"/>
+              </a:spcAft>
+            </a:pPr>
+            <a:r>
+              <a:rPr sz="1500" b="0" i="0">
+                <a:solidFill>
+                  <a:srgbClr val="0A0E1A"/>
+                </a:solidFill>
+                <a:latin typeface="Calibri"/>
+              </a:rPr>
+              <a:t>Cambia notas, guarda, y vuelve a Unity: se actualiza sola.</a:t>
+            </a:r>
+          </a:p>
+        </p:txBody>
+      </p:sp>
+      <p:sp>
+        <p:nvSpPr>
+          <p:cNvPr id="10" name="Oval 9"/>
+          <p:cNvSpPr/>
+          <p:nvPr/>
+        </p:nvSpPr>
+        <p:spPr>
+          <a:xfrm>
+            <a:off x="548640" y="3977639"/>
+            <a:ext cx="347472" cy="347472"/>
+          </a:xfrm>
+          <a:prstGeom prst="ellipse">
+            <a:avLst/>
+          </a:prstGeom>
+          <a:solidFill>
+            <a:srgbClr val="7317C9"/>
+          </a:solidFill>
+          <a:ln>
+            <a:noFill/>
+          </a:ln>
+          <a:effectLst/>
+        </p:spPr>
+        <p:style>
+          <a:lnRef idx="1">
+            <a:schemeClr val="accent1"/>
+          </a:lnRef>
+          <a:fillRef idx="3">
+            <a:schemeClr val="accent1"/>
+          </a:fillRef>
+          <a:effectRef idx="2">
+            <a:schemeClr val="accent1"/>
+          </a:effectRef>
+          <a:fontRef idx="minor">
+            <a:schemeClr val="lt1"/>
+          </a:fontRef>
+        </p:style>
+        <p:txBody>
+          <a:bodyPr rtlCol="0" anchor="ctr" lIns="0" rIns="0" tIns="0" bIns="0"/>
+          <a:lstStyle/>
+          <a:p>
+            <a:pPr algn="ctr"/>
+            <a:r>
+              <a:rPr sz="1300" b="1">
+                <a:solidFill>
+                  <a:srgbClr val="FFFFFF"/>
+                </a:solidFill>
+                <a:latin typeface="Calibri"/>
+              </a:rPr>
+              <a:t>4</a:t>
+            </a:r>
+          </a:p>
+        </p:txBody>
+      </p:sp>
+      <p:sp>
+        <p:nvSpPr>
+          <p:cNvPr id="11" name="TextBox 10"/>
+          <p:cNvSpPr txBox="1"/>
+          <p:nvPr/>
+        </p:nvSpPr>
+        <p:spPr>
+          <a:xfrm>
+            <a:off x="1051560" y="3995927"/>
+            <a:ext cx="5349240" cy="502920"/>
+          </a:xfrm>
+          <a:prstGeom prst="rect">
+            <a:avLst/>
+          </a:prstGeom>
+          <a:noFill/>
+        </p:spPr>
+        <p:txBody>
+          <a:bodyPr wrap="square" lIns="0" rIns="0" tIns="0" bIns="0" anchor="t">
+            <a:spAutoFit/>
+          </a:bodyPr>
+          <a:lstStyle/>
+          <a:p>
+            <a:pPr algn="l">
+              <a:spcAft>
+                <a:spcPts val="600"/>
+              </a:spcAft>
+            </a:pPr>
+            <a:r>
+              <a:rPr sz="1500" b="0" i="0">
+                <a:solidFill>
+                  <a:srgbClr val="0A0E1A"/>
+                </a:solidFill>
+                <a:latin typeface="Calibri"/>
+              </a:rPr>
+              <a:t>En Musica Por Genero, cambia la </a:t>
+            </a:r>
+            <a:r>
+              <a:rPr sz="1500" b="1" i="0">
+                <a:solidFill>
+                  <a:srgbClr val="0A0E1A"/>
+                </a:solidFill>
+                <a:latin typeface="Calibri"/>
+              </a:rPr>
+              <a:t>Partitura</a:t>
+            </a:r>
+            <a:r>
+              <a:rPr sz="1500" b="0" i="0">
+                <a:solidFill>
+                  <a:srgbClr val="0A0E1A"/>
+                </a:solidFill>
+                <a:latin typeface="Calibri"/>
+              </a:rPr>
+              <a:t> de Rock por MiRock.</a:t>
+            </a:r>
+          </a:p>
+        </p:txBody>
+      </p:sp>
+      <p:sp>
+        <p:nvSpPr>
+          <p:cNvPr id="12" name="Rounded Rectangle 11"/>
+          <p:cNvSpPr/>
+          <p:nvPr/>
+        </p:nvSpPr>
+        <p:spPr>
+          <a:xfrm>
+            <a:off x="6766560" y="1645920"/>
+            <a:ext cx="4892040" cy="2971800"/>
           </a:xfrm>
           <a:prstGeom prst="roundRect">
             <a:avLst>
@@ -6233,14 +6688,14 @@
       </p:sp>
       <p:sp>
         <p:nvSpPr>
-          <p:cNvPr id="8" name="TextBox 7"/>
+          <p:cNvPr id="13" name="TextBox 12"/>
           <p:cNvSpPr txBox="1"/>
           <p:nvPr/>
         </p:nvSpPr>
         <p:spPr>
           <a:xfrm>
-            <a:off x="777240" y="3538728"/>
-            <a:ext cx="5029200" cy="1097280"/>
+            <a:off x="6995160" y="1783080"/>
+            <a:ext cx="4480560" cy="2743200"/>
           </a:xfrm>
           <a:prstGeom prst="rect">
             <a:avLst/>
@@ -6255,46 +6710,467 @@
           <a:p>
             <a:pPr algn="l">
               <a:spcAft>
+                <a:spcPts val="800"/>
+              </a:spcAft>
+            </a:pPr>
+            <a:r>
+              <a:rPr sz="1400" b="1" i="0">
+                <a:solidFill>
+                  <a:srgbClr val="0A0E1A"/>
+                </a:solidFill>
+                <a:latin typeface="Calibri"/>
+              </a:rPr>
+              <a:t>Cuentas que sirven</a:t>
+            </a:r>
+          </a:p>
+          <a:p>
+            <a:pPr algn="l">
+              <a:spcAft>
+                <a:spcPts val="800"/>
+              </a:spcAft>
+            </a:pPr>
+            <a:r>
+              <a:rPr sz="1400" b="0" i="0">
+                <a:solidFill>
+                  <a:srgbClr val="0A0E1A"/>
+                </a:solidFill>
+                <a:latin typeface="Calibri"/>
+              </a:rPr>
+              <a:t>A 120 BPM, un pulso dura medio segundo. Un compás son 4 pulsos.</a:t>
+            </a:r>
+          </a:p>
+          <a:p>
+            <a:pPr algn="l">
+              <a:spcAft>
+                <a:spcPts val="800"/>
+              </a:spcAft>
+            </a:pPr>
+            <a:r>
+              <a:rPr sz="1400" b="0" i="0">
+                <a:solidFill>
+                  <a:srgbClr val="0A0E1A"/>
+                </a:solidFill>
+                <a:latin typeface="Calibri"/>
+              </a:rPr>
+              <a:t>Rock tiene 128 pulsos; deja vacíos los últimos 8.</a:t>
+            </a:r>
+          </a:p>
+          <a:p>
+            <a:pPr algn="l">
+              <a:spcAft>
+                <a:spcPts val="800"/>
+              </a:spcAft>
+            </a:pPr>
+            <a:r>
+              <a:rPr sz="1400" b="0" i="0">
+                <a:solidFill>
+                  <a:srgbClr val="0A0E1A"/>
+                </a:solidFill>
+                <a:latin typeface="Calibri"/>
+              </a:rPr>
+              <a:t>Se pueden usar medios pulsos: 9.5 es una corchea.</a:t>
+            </a:r>
+          </a:p>
+        </p:txBody>
+      </p:sp>
+      <p:sp>
+        <p:nvSpPr>
+          <p:cNvPr id="14" name="Rounded Rectangle 13"/>
+          <p:cNvSpPr/>
+          <p:nvPr/>
+        </p:nvSpPr>
+        <p:spPr>
+          <a:xfrm>
+            <a:off x="6766560" y="4800600"/>
+            <a:ext cx="4892040" cy="1417320"/>
+          </a:xfrm>
+          <a:prstGeom prst="roundRect">
+            <a:avLst>
+              <a:gd name="adj" fmla="val 8000"/>
+            </a:avLst>
+          </a:prstGeom>
+          <a:solidFill>
+            <a:srgbClr val="FCF1DC"/>
+          </a:solidFill>
+          <a:ln>
+            <a:noFill/>
+          </a:ln>
+          <a:effectLst/>
+        </p:spPr>
+        <p:style>
+          <a:lnRef idx="1">
+            <a:schemeClr val="accent1"/>
+          </a:lnRef>
+          <a:fillRef idx="3">
+            <a:schemeClr val="accent1"/>
+          </a:fillRef>
+          <a:effectRef idx="2">
+            <a:schemeClr val="accent1"/>
+          </a:effectRef>
+          <a:fontRef idx="minor">
+            <a:schemeClr val="lt1"/>
+          </a:fontRef>
+        </p:style>
+        <p:txBody>
+          <a:bodyPr rtlCol="0" anchor="ctr"/>
+          <a:lstStyle/>
+          <a:p/>
+        </p:txBody>
+      </p:sp>
+      <p:sp>
+        <p:nvSpPr>
+          <p:cNvPr id="15" name="TextBox 14"/>
+          <p:cNvSpPr txBox="1"/>
+          <p:nvPr/>
+        </p:nvSpPr>
+        <p:spPr>
+          <a:xfrm>
+            <a:off x="6995160" y="4965192"/>
+            <a:ext cx="4434840" cy="1143000"/>
+          </a:xfrm>
+          <a:prstGeom prst="rect">
+            <a:avLst/>
+          </a:prstGeom>
+          <a:noFill/>
+        </p:spPr>
+        <p:txBody>
+          <a:bodyPr wrap="square" lIns="0" rIns="0" tIns="0" bIns="0" anchor="t">
+            <a:spAutoFit/>
+          </a:bodyPr>
+          <a:lstStyle/>
+          <a:p>
+            <a:pPr algn="l">
+              <a:spcAft>
                 <a:spcPts val="400"/>
               </a:spcAft>
             </a:pPr>
             <a:r>
               <a:rPr sz="1300" b="1" i="0">
                 <a:solidFill>
-                  <a:srgbClr val="B3261E"/>
+                  <a:srgbClr val="875A00"/>
+                </a:solidFill>
+                <a:latin typeface="Calibri"/>
+              </a:rPr>
+              <a:t>!  El decimal es punto</a:t>
+            </a:r>
+          </a:p>
+          <a:p>
+            <a:pPr algn="l">
+              <a:spcAft>
+                <a:spcPts val="400"/>
+              </a:spcAft>
+            </a:pPr>
+            <a:r>
+              <a:rPr sz="1300" b="0" i="0">
+                <a:solidFill>
+                  <a:srgbClr val="0A0E1A"/>
+                </a:solidFill>
+                <a:latin typeface="Calibri"/>
+              </a:rPr>
+              <a:t>En la partitura se escribe 9.5 y no 9,5, aunque Windows esté en español.</a:t>
+            </a:r>
+          </a:p>
+        </p:txBody>
+      </p:sp>
+      <p:sp>
+        <p:nvSpPr>
+          <p:cNvPr id="16" name="Pie"/>
+          <p:cNvSpPr txBox="1"/>
+          <p:nvPr/>
+        </p:nvSpPr>
+        <p:spPr>
+          <a:xfrm>
+            <a:off x="548640" y="6400800"/>
+            <a:ext cx="11064240" cy="274320"/>
+          </a:xfrm>
+          <a:prstGeom prst="rect">
+            <a:avLst/>
+          </a:prstGeom>
+          <a:noFill/>
+        </p:spPr>
+        <p:txBody>
+          <a:bodyPr wrap="square" lIns="0" rIns="0" tIns="0" bIns="0" anchor="t">
+            <a:spAutoFit/>
+          </a:bodyPr>
+          <a:lstStyle/>
+          <a:p>
+            <a:pPr algn="r">
+              <a:spcAft>
+                <a:spcPts val="600"/>
+              </a:spcAft>
+            </a:pPr>
+            <a:r>
+              <a:rPr sz="1100" b="0" i="0">
+                <a:solidFill>
+                  <a:srgbClr val="4F5C75"/>
+                </a:solidFill>
+                <a:latin typeface="Calibri"/>
+              </a:rPr>
+              <a:t>Guía 1 · Ritmo  ·  12 de 14</a:t>
+            </a:r>
+          </a:p>
+        </p:txBody>
+      </p:sp>
+    </p:spTree>
+  </p:cSld>
+  <p:clrMapOvr>
+    <a:masterClrMapping/>
+  </p:clrMapOvr>
+</p:sld>
+</file>
+
+<file path=ppt/slides/slide13.xml><?xml version="1.0" encoding="utf-8"?>
+<p:sld xmlns:a="http://schemas.openxmlformats.org/drawingml/2006/main" xmlns:p="http://schemas.openxmlformats.org/presentationml/2006/main" xmlns:r="http://schemas.openxmlformats.org/officeDocument/2006/relationships">
+  <p:cSld>
+    <p:bg>
+      <p:bgPr>
+        <a:solidFill>
+          <a:srgbClr val="EFF3FA"/>
+        </a:solidFill>
+        <a:effectLst/>
+      </p:bgPr>
+    </p:bg>
+    <p:spTree>
+      <p:nvGrpSpPr>
+        <p:cNvPr id="1" name=""/>
+        <p:cNvGrpSpPr/>
+        <p:nvPr/>
+      </p:nvGrpSpPr>
+      <p:grpSpPr/>
+      <p:sp>
+        <p:nvSpPr>
+          <p:cNvPr id="2" name="Etiqueta de sección"/>
+          <p:cNvSpPr txBox="1"/>
+          <p:nvPr/>
+        </p:nvSpPr>
+        <p:spPr>
+          <a:xfrm>
+            <a:off x="548640" y="320040"/>
+            <a:ext cx="2743200" cy="274320"/>
+          </a:xfrm>
+          <a:prstGeom prst="rect">
+            <a:avLst/>
+          </a:prstGeom>
+          <a:noFill/>
+        </p:spPr>
+        <p:txBody>
+          <a:bodyPr wrap="square" lIns="0" rIns="0" tIns="0" bIns="0" anchor="t">
+            <a:spAutoFit/>
+          </a:bodyPr>
+          <a:lstStyle/>
+          <a:p>
+            <a:pPr algn="l">
+              <a:spcAft>
+                <a:spcPts val="600"/>
+              </a:spcAft>
+            </a:pPr>
+            <a:r>
+              <a:rPr sz="1200" b="1" i="0">
+                <a:solidFill>
+                  <a:srgbClr val="7317C9"/>
+                </a:solidFill>
+                <a:latin typeface="Calibri"/>
+              </a:rPr>
+              <a:t>Unity</a:t>
+            </a:r>
+          </a:p>
+        </p:txBody>
+      </p:sp>
+      <p:sp>
+        <p:nvSpPr>
+          <p:cNvPr id="3" name="Título"/>
+          <p:cNvSpPr txBox="1"/>
+          <p:nvPr/>
+        </p:nvSpPr>
+        <p:spPr>
+          <a:xfrm>
+            <a:off x="548640" y="658368"/>
+            <a:ext cx="11064240" cy="731520"/>
+          </a:xfrm>
+          <a:prstGeom prst="rect">
+            <a:avLst/>
+          </a:prstGeom>
+          <a:noFill/>
+        </p:spPr>
+        <p:txBody>
+          <a:bodyPr wrap="square" lIns="0" rIns="0" tIns="0" bIns="0" anchor="t">
+            <a:spAutoFit/>
+          </a:bodyPr>
+          <a:lstStyle/>
+          <a:p>
+            <a:pPr algn="l">
+              <a:spcAft>
+                <a:spcPts val="600"/>
+              </a:spcAft>
+            </a:pPr>
+            <a:r>
+              <a:rPr sz="3200" b="1" i="0">
+                <a:solidFill>
+                  <a:srgbClr val="0A0E1A"/>
+                </a:solidFill>
+                <a:latin typeface="Cambria"/>
+              </a:rPr>
+              <a:t>Los datos y los errores más comunes</a:t>
+            </a:r>
+          </a:p>
+        </p:txBody>
+      </p:sp>
+      <p:sp>
+        <p:nvSpPr>
+          <p:cNvPr id="4" name="Rounded Rectangle 3"/>
+          <p:cNvSpPr/>
+          <p:nvPr/>
+        </p:nvSpPr>
+        <p:spPr>
+          <a:xfrm>
+            <a:off x="548640" y="1645920"/>
+            <a:ext cx="11109960" cy="1097280"/>
+          </a:xfrm>
+          <a:prstGeom prst="roundRect">
+            <a:avLst>
+              <a:gd name="adj" fmla="val 5000"/>
+            </a:avLst>
+          </a:prstGeom>
+          <a:solidFill>
+            <a:srgbClr val="0F1424"/>
+          </a:solidFill>
+          <a:ln>
+            <a:noFill/>
+          </a:ln>
+          <a:effectLst/>
+        </p:spPr>
+        <p:style>
+          <a:lnRef idx="1">
+            <a:schemeClr val="accent1"/>
+          </a:lnRef>
+          <a:fillRef idx="3">
+            <a:schemeClr val="accent1"/>
+          </a:fillRef>
+          <a:effectRef idx="2">
+            <a:schemeClr val="accent1"/>
+          </a:effectRef>
+          <a:fontRef idx="minor">
+            <a:schemeClr val="lt1"/>
+          </a:fontRef>
+        </p:style>
+        <p:txBody>
+          <a:bodyPr rtlCol="0" anchor="ctr"/>
+          <a:lstStyle/>
+          <a:p/>
+        </p:txBody>
+      </p:sp>
+      <p:sp>
+        <p:nvSpPr>
+          <p:cNvPr id="5" name="TextBox 4"/>
+          <p:cNvSpPr txBox="1"/>
+          <p:nvPr/>
+        </p:nvSpPr>
+        <p:spPr>
+          <a:xfrm>
+            <a:off x="777240" y="1828800"/>
+            <a:ext cx="10652760" cy="822959"/>
+          </a:xfrm>
+          <a:prstGeom prst="rect">
+            <a:avLst/>
+          </a:prstGeom>
+          <a:noFill/>
+        </p:spPr>
+        <p:txBody>
+          <a:bodyPr wrap="square" lIns="0" rIns="0" tIns="0" bIns="0" anchor="t">
+            <a:spAutoFit/>
+          </a:bodyPr>
+          <a:lstStyle/>
+          <a:p>
+            <a:pPr algn="l">
+              <a:spcAft>
+                <a:spcPts val="200"/>
+              </a:spcAft>
+            </a:pPr>
+            <a:r>
+              <a:rPr sz="1200" b="0" i="0">
+                <a:solidFill>
+                  <a:srgbClr val="E9EEFB"/>
                 </a:solidFill>
                 <a:latin typeface="Consolas"/>
               </a:rPr>
-              <a:t>Las notas no salen</a:t>
-            </a:r>
-          </a:p>
-          <a:p>
-            <a:pPr algn="l">
-              <a:spcAft>
-                <a:spcPts val="400"/>
-              </a:spcAft>
-            </a:pPr>
-            <a:r>
-              <a:rPr sz="1400" b="0" i="0">
-                <a:solidFill>
-                  <a:srgbClr val="0A0E1A"/>
-                </a:solidFill>
-                <a:latin typeface="Calibri"/>
-              </a:rPr>
-              <a:t>Falta el prefab en Prefab Nota, o la partitura está vacía.</a:t>
-            </a:r>
-          </a:p>
-        </p:txBody>
-      </p:sp>
-      <p:sp>
-        <p:nvSpPr>
-          <p:cNvPr id="9" name="Rounded Rectangle 8"/>
+              <a:t>fecha;mano;sensibilidad;genero;puntaje;precisionPct;errorPromedioMs;perfectos;buenos;fallos;sostenidasCompletas</a:t>
+            </a:r>
+          </a:p>
+          <a:p>
+            <a:pPr algn="l">
+              <a:spcAft>
+                <a:spcPts val="200"/>
+              </a:spcAft>
+            </a:pPr>
+            <a:r>
+              <a:rPr sz="1200" b="0" i="0">
+                <a:solidFill>
+                  <a:srgbClr val="E9EEFB"/>
+                </a:solidFill>
+                <a:latin typeface="Consolas"/>
+              </a:rPr>
+              <a:t>2026-10-21 08:29:54;Derecha;1,00;Electronica;122900;100,0;6;112;0;0;7</a:t>
+            </a:r>
+          </a:p>
+        </p:txBody>
+      </p:sp>
+      <p:sp>
+        <p:nvSpPr>
+          <p:cNvPr id="6" name="TextBox 5"/>
+          <p:cNvSpPr txBox="1"/>
+          <p:nvPr/>
+        </p:nvSpPr>
+        <p:spPr>
+          <a:xfrm>
+            <a:off x="548640" y="2834640"/>
+            <a:ext cx="11064240" cy="365760"/>
+          </a:xfrm>
+          <a:prstGeom prst="rect">
+            <a:avLst/>
+          </a:prstGeom>
+          <a:noFill/>
+        </p:spPr>
+        <p:txBody>
+          <a:bodyPr wrap="square" lIns="0" rIns="0" tIns="0" bIns="0" anchor="t">
+            <a:spAutoFit/>
+          </a:bodyPr>
+          <a:lstStyle/>
+          <a:p>
+            <a:pPr algn="l">
+              <a:spcAft>
+                <a:spcPts val="600"/>
+              </a:spcAft>
+            </a:pPr>
+            <a:r>
+              <a:rPr sz="1300" b="0" i="0">
+                <a:solidFill>
+                  <a:srgbClr val="4F5C75"/>
+                </a:solidFill>
+                <a:latin typeface="Consolas"/>
+              </a:rPr>
+              <a:t>resultados_Ritmo.csv</a:t>
+            </a:r>
+            <a:r>
+              <a:rPr sz="1300" b="0" i="0">
+                <a:solidFill>
+                  <a:srgbClr val="4F5C75"/>
+                </a:solidFill>
+                <a:latin typeface="Calibri"/>
+              </a:rPr>
+              <a:t>, en AppData\LocalLow\&lt;empresa&gt;\&lt;proyecto&gt;. Se abre con doble clic en Excel. Esta fila es real.</a:t>
+            </a:r>
+          </a:p>
+        </p:txBody>
+      </p:sp>
+      <p:sp>
+        <p:nvSpPr>
+          <p:cNvPr id="7" name="Rounded Rectangle 6"/>
           <p:cNvSpPr/>
           <p:nvPr/>
         </p:nvSpPr>
         <p:spPr>
           <a:xfrm>
-            <a:off x="6172200" y="3383280"/>
+            <a:off x="548640" y="3383280"/>
             <a:ext cx="5440680" cy="1298448"/>
           </a:xfrm>
           <a:prstGeom prst="roundRect">
@@ -6334,13 +7210,13 @@
       </p:sp>
       <p:sp>
         <p:nvSpPr>
-          <p:cNvPr id="10" name="TextBox 9"/>
+          <p:cNvPr id="8" name="TextBox 7"/>
           <p:cNvSpPr txBox="1"/>
           <p:nvPr/>
         </p:nvSpPr>
         <p:spPr>
           <a:xfrm>
-            <a:off x="6400800" y="3538728"/>
+            <a:off x="777240" y="3538728"/>
             <a:ext cx="5029200" cy="1097280"/>
           </a:xfrm>
           <a:prstGeom prst="rect">
@@ -6366,7 +7242,7 @@
                 </a:solidFill>
                 <a:latin typeface="Consolas"/>
               </a:rPr>
-              <a:t>IndexOutOfRangeException</a:t>
+              <a:t>Las notas no salen</a:t>
             </a:r>
           </a:p>
           <a:p>
@@ -6382,20 +7258,20 @@
                 </a:solidFill>
                 <a:latin typeface="Calibri"/>
               </a:rPr>
-              <a:t>Carriles tiene menos de 6 elementos.</a:t>
-            </a:r>
-          </a:p>
-        </p:txBody>
-      </p:sp>
-      <p:sp>
-        <p:nvSpPr>
-          <p:cNvPr id="11" name="Rounded Rectangle 10"/>
+              <a:t>Falta el prefab en Prefab Nota, o la partitura está vacía.</a:t>
+            </a:r>
+          </a:p>
+        </p:txBody>
+      </p:sp>
+      <p:sp>
+        <p:nvSpPr>
+          <p:cNvPr id="9" name="Rounded Rectangle 8"/>
           <p:cNvSpPr/>
           <p:nvPr/>
         </p:nvSpPr>
         <p:spPr>
           <a:xfrm>
-            <a:off x="548640" y="4846320"/>
+            <a:off x="6172200" y="3383280"/>
             <a:ext cx="5440680" cy="1298448"/>
           </a:xfrm>
           <a:prstGeom prst="roundRect">
@@ -6435,13 +7311,13 @@
       </p:sp>
       <p:sp>
         <p:nvSpPr>
-          <p:cNvPr id="12" name="TextBox 11"/>
+          <p:cNvPr id="10" name="TextBox 9"/>
           <p:cNvSpPr txBox="1"/>
           <p:nvPr/>
         </p:nvSpPr>
         <p:spPr>
           <a:xfrm>
-            <a:off x="777240" y="5001768"/>
+            <a:off x="6400800" y="3538728"/>
             <a:ext cx="5029200" cy="1097280"/>
           </a:xfrm>
           <a:prstGeom prst="rect">
@@ -6467,7 +7343,7 @@
                 </a:solidFill>
                 <a:latin typeface="Consolas"/>
               </a:rPr>
-              <a:t>Las notas van corridas</a:t>
+              <a:t>IndexOutOfRangeException</a:t>
             </a:r>
           </a:p>
           <a:p>
@@ -6483,20 +7359,20 @@
                 </a:solidFill>
                 <a:latin typeface="Calibri"/>
               </a:rPr>
-              <a:t>Play On Awake quedó marcado en el Audio Source.</a:t>
-            </a:r>
-          </a:p>
-        </p:txBody>
-      </p:sp>
-      <p:sp>
-        <p:nvSpPr>
-          <p:cNvPr id="13" name="Rounded Rectangle 12"/>
+              <a:t>Carriles tiene menos de 6 elementos.</a:t>
+            </a:r>
+          </a:p>
+        </p:txBody>
+      </p:sp>
+      <p:sp>
+        <p:nvSpPr>
+          <p:cNvPr id="11" name="Rounded Rectangle 10"/>
           <p:cNvSpPr/>
           <p:nvPr/>
         </p:nvSpPr>
         <p:spPr>
           <a:xfrm>
-            <a:off x="6172200" y="4846320"/>
+            <a:off x="548640" y="4846320"/>
             <a:ext cx="5440680" cy="1298448"/>
           </a:xfrm>
           <a:prstGeom prst="roundRect">
@@ -6536,13 +7412,13 @@
       </p:sp>
       <p:sp>
         <p:nvSpPr>
-          <p:cNvPr id="14" name="TextBox 13"/>
+          <p:cNvPr id="12" name="TextBox 11"/>
           <p:cNvSpPr txBox="1"/>
           <p:nvPr/>
         </p:nvSpPr>
         <p:spPr>
           <a:xfrm>
-            <a:off x="6400800" y="5001768"/>
+            <a:off x="777240" y="5001768"/>
             <a:ext cx="5029200" cy="1097280"/>
           </a:xfrm>
           <a:prstGeom prst="rect">
@@ -6568,7 +7444,7 @@
                 </a:solidFill>
                 <a:latin typeface="Consolas"/>
               </a:rPr>
-              <a:t>Suena otra canción</a:t>
+              <a:t>Las notas van corridas</a:t>
             </a:r>
           </a:p>
           <a:p>
@@ -6584,21 +7460,67 @@
                 </a:solidFill>
                 <a:latin typeface="Calibri"/>
               </a:rPr>
-              <a:t>El género del botón no se escribe igual que en la opción.</a:t>
-            </a:r>
-          </a:p>
-        </p:txBody>
-      </p:sp>
-      <p:sp>
-        <p:nvSpPr>
-          <p:cNvPr id="15" name="Pie"/>
+              <a:t>Play On Awake quedó marcado en el Audio Source.</a:t>
+            </a:r>
+          </a:p>
+        </p:txBody>
+      </p:sp>
+      <p:sp>
+        <p:nvSpPr>
+          <p:cNvPr id="13" name="Rounded Rectangle 12"/>
+          <p:cNvSpPr/>
+          <p:nvPr/>
+        </p:nvSpPr>
+        <p:spPr>
+          <a:xfrm>
+            <a:off x="6172200" y="4846320"/>
+            <a:ext cx="5440680" cy="1298448"/>
+          </a:xfrm>
+          <a:prstGeom prst="roundRect">
+            <a:avLst>
+              <a:gd name="adj" fmla="val 6000"/>
+            </a:avLst>
+          </a:prstGeom>
+          <a:solidFill>
+            <a:srgbClr val="FFFFFF"/>
+          </a:solidFill>
+          <a:ln w="12700">
+            <a:solidFill>
+              <a:srgbClr val="D2DAE9"/>
+            </a:solidFill>
+          </a:ln>
+          <a:effectLst/>
+        </p:spPr>
+        <p:style>
+          <a:lnRef idx="1">
+            <a:schemeClr val="accent1"/>
+          </a:lnRef>
+          <a:fillRef idx="3">
+            <a:schemeClr val="accent1"/>
+          </a:fillRef>
+          <a:effectRef idx="2">
+            <a:schemeClr val="accent1"/>
+          </a:effectRef>
+          <a:fontRef idx="minor">
+            <a:schemeClr val="lt1"/>
+          </a:fontRef>
+        </p:style>
+        <p:txBody>
+          <a:bodyPr rtlCol="0" anchor="ctr"/>
+          <a:lstStyle/>
+          <a:p/>
+        </p:txBody>
+      </p:sp>
+      <p:sp>
+        <p:nvSpPr>
+          <p:cNvPr id="14" name="TextBox 13"/>
           <p:cNvSpPr txBox="1"/>
           <p:nvPr/>
         </p:nvSpPr>
         <p:spPr>
           <a:xfrm>
-            <a:off x="548640" y="6400800"/>
-            <a:ext cx="11064240" cy="274320"/>
+            <a:off x="6400800" y="5001768"/>
+            <a:ext cx="5029200" cy="1097280"/>
           </a:xfrm>
           <a:prstGeom prst="rect">
             <a:avLst/>
@@ -6611,6 +7533,61 @@
           </a:bodyPr>
           <a:lstStyle/>
           <a:p>
+            <a:pPr algn="l">
+              <a:spcAft>
+                <a:spcPts val="400"/>
+              </a:spcAft>
+            </a:pPr>
+            <a:r>
+              <a:rPr sz="1300" b="1" i="0">
+                <a:solidFill>
+                  <a:srgbClr val="B3261E"/>
+                </a:solidFill>
+                <a:latin typeface="Consolas"/>
+              </a:rPr>
+              <a:t>Suena otra canción</a:t>
+            </a:r>
+          </a:p>
+          <a:p>
+            <a:pPr algn="l">
+              <a:spcAft>
+                <a:spcPts val="400"/>
+              </a:spcAft>
+            </a:pPr>
+            <a:r>
+              <a:rPr sz="1400" b="0" i="0">
+                <a:solidFill>
+                  <a:srgbClr val="0A0E1A"/>
+                </a:solidFill>
+                <a:latin typeface="Calibri"/>
+              </a:rPr>
+              <a:t>El género del botón no se escribe igual que en la opción.</a:t>
+            </a:r>
+          </a:p>
+        </p:txBody>
+      </p:sp>
+      <p:sp>
+        <p:nvSpPr>
+          <p:cNvPr id="15" name="Pie"/>
+          <p:cNvSpPr txBox="1"/>
+          <p:nvPr/>
+        </p:nvSpPr>
+        <p:spPr>
+          <a:xfrm>
+            <a:off x="548640" y="6400800"/>
+            <a:ext cx="11064240" cy="274320"/>
+          </a:xfrm>
+          <a:prstGeom prst="rect">
+            <a:avLst/>
+          </a:prstGeom>
+          <a:noFill/>
+        </p:spPr>
+        <p:txBody>
+          <a:bodyPr wrap="square" lIns="0" rIns="0" tIns="0" bIns="0" anchor="t">
+            <a:spAutoFit/>
+          </a:bodyPr>
+          <a:lstStyle/>
+          <a:p>
             <a:pPr algn="r">
               <a:spcAft>
                 <a:spcPts val="600"/>
@@ -6623,7 +7600,7 @@
                 </a:solidFill>
                 <a:latin typeface="Calibri"/>
               </a:rPr>
-              <a:t>Guía 1 · Ritmo  ·  12 de 13</a:t>
+              <a:t>Guía 1 · Ritmo  ·  13 de 14</a:t>
             </a:r>
           </a:p>
         </p:txBody>
@@ -6636,7 +7613,7 @@
 </p:sld>
 </file>
 
-<file path=ppt/slides/slide13.xml><?xml version="1.0" encoding="utf-8"?>
+<file path=ppt/slides/slide14.xml><?xml version="1.0" encoding="utf-8"?>
 <p:sld xmlns:a="http://schemas.openxmlformats.org/drawingml/2006/main" xmlns:p="http://schemas.openxmlformats.org/presentationml/2006/main" xmlns:r="http://schemas.openxmlformats.org/officeDocument/2006/relationships">
   <p:cSld>
     <p:bg>
@@ -7121,7 +8098,7 @@
                 </a:solidFill>
                 <a:latin typeface="Calibri"/>
               </a:rPr>
-              <a:t>Guía 1 · Ritmo  ·  13 de 13</a:t>
+              <a:t>Guía 1 · Ritmo  ·  14 de 14</a:t>
             </a:r>
           </a:p>
         </p:txBody>
@@ -7832,7 +8809,7 @@
                 </a:solidFill>
                 <a:latin typeface="Calibri"/>
               </a:rPr>
-              <a:t>Guía 1 · Ritmo  ·  2 de 13</a:t>
+              <a:t>Guía 1 · Ritmo  ·  2 de 14</a:t>
             </a:r>
           </a:p>
         </p:txBody>
@@ -8069,7 +9046,7 @@
                 </a:solidFill>
                 <a:latin typeface="Calibri"/>
               </a:rPr>
-              <a:t>Nota (cabeza y cola), PantallaFinal</a:t>
+              <a:t>Nota (cabeza y cola), Pausa, PantallaFinal</a:t>
             </a:r>
           </a:p>
           <a:p>
@@ -8751,7 +9728,7 @@
                 </a:solidFill>
                 <a:latin typeface="Calibri"/>
               </a:rPr>
-              <a:t>Guía 1 · Ritmo  ·  3 de 13</a:t>
+              <a:t>Guía 1 · Ritmo  ·  3 de 14</a:t>
             </a:r>
           </a:p>
         </p:txBody>
@@ -9514,7 +10491,7 @@
                 </a:solidFill>
                 <a:latin typeface="Calibri"/>
               </a:rPr>
-              <a:t>Guía 1 · Ritmo  ·  4 de 13</a:t>
+              <a:t>Guía 1 · Ritmo  ·  4 de 14</a:t>
             </a:r>
           </a:p>
         </p:txBody>
@@ -10512,7 +11489,7 @@
                 </a:solidFill>
                 <a:latin typeface="Calibri"/>
               </a:rPr>
-              <a:t>Guía 1 · Ritmo  ·  5 de 13</a:t>
+              <a:t>Guía 1 · Ritmo  ·  5 de 14</a:t>
             </a:r>
           </a:p>
         </p:txBody>
@@ -11596,7 +12573,7 @@
                 </a:solidFill>
                 <a:latin typeface="Calibri"/>
               </a:rPr>
-              <a:t>Guía 1 · Ritmo  ·  6 de 13</a:t>
+              <a:t>Guía 1 · Ritmo  ·  6 de 14</a:t>
             </a:r>
           </a:p>
         </p:txBody>
@@ -12502,7 +13479,7 @@
                 </a:solidFill>
                 <a:latin typeface="Calibri"/>
               </a:rPr>
-              <a:t>Guía 1 · Ritmo  ·  7 de 13</a:t>
+              <a:t>Guía 1 · Ritmo  ·  7 de 14</a:t>
             </a:r>
           </a:p>
         </p:txBody>
@@ -13477,7 +14454,7 @@
                 </a:solidFill>
                 <a:latin typeface="Calibri"/>
               </a:rPr>
-              <a:t>Guía 1 · Ritmo  ·  8 de 13</a:t>
+              <a:t>Guía 1 · Ritmo  ·  8 de 14</a:t>
             </a:r>
           </a:p>
         </p:txBody>
@@ -14425,7 +15402,7 @@
                 </a:solidFill>
                 <a:latin typeface="Calibri"/>
               </a:rPr>
-              <a:t>Guía 1 · Ritmo  ·  9 de 13</a:t>
+              <a:t>Guía 1 · Ritmo  ·  9 de 14</a:t>
             </a:r>
           </a:p>
         </p:txBody>
